--- a/deck/NL_Blinkit_CategoryAdoption.pptx
+++ b/deck/NL_Blinkit_CategoryAdoption.pptx
@@ -16,7 +16,7 @@
     <p:sldId id="264" r:id="rId16"/>
     <p:sldId id="265" r:id="rId17"/>
   </p:sldIdLst>
-  <p:sldSz cx="12191695" cy="6858000" type="screen4x3"/>
+  <p:sldSz cx="18287542" cy="10287000" type="screen4x3"/>
   <p:notesSz cx="6858000" cy="9144000"/>
   <p:defaultTextStyle>
     <a:defPPr>
@@ -4156,7 +4156,7 @@
         <p:spPr>
           <a:xfrm>
             <a:off x="0" y="0"/>
-            <a:ext cx="12191695" cy="6858000"/>
+            <a:ext cx="18287542" cy="10287000"/>
           </a:xfrm>
           <a:prstGeom prst="rect">
             <a:avLst/>
@@ -4207,8 +4207,8 @@
         </p:blipFill>
         <p:spPr>
           <a:xfrm>
-            <a:off x="502920" y="457200"/>
-            <a:ext cx="975836" cy="274320"/>
+            <a:off x="754380" y="685800"/>
+            <a:ext cx="1463751" cy="411479"/>
           </a:xfrm>
           <a:prstGeom prst="rect">
             <a:avLst/>
@@ -4223,8 +4223,8 @@
         </p:nvSpPr>
         <p:spPr>
           <a:xfrm>
-            <a:off x="1280160" y="429768"/>
-            <a:ext cx="9601200" cy="365760"/>
+            <a:off x="1920239" y="644652"/>
+            <a:ext cx="14401800" cy="548640"/>
           </a:xfrm>
           <a:prstGeom prst="rect">
             <a:avLst/>
@@ -4238,7 +4238,7 @@
           <a:lstStyle/>
           <a:p>
             <a:r>
-              <a:rPr sz="1400" b="1" i="0">
+              <a:rPr sz="1950" b="1" i="0">
                 <a:solidFill>
                   <a:srgbClr val="7A6100"/>
                 </a:solidFill>
@@ -4257,8 +4257,8 @@
         </p:nvSpPr>
         <p:spPr>
           <a:xfrm>
-            <a:off x="502920" y="868680"/>
-            <a:ext cx="11155680" cy="1051560"/>
+            <a:off x="754380" y="1303019"/>
+            <a:ext cx="16733519" cy="1577339"/>
           </a:xfrm>
           <a:prstGeom prst="rect">
             <a:avLst/>
@@ -4272,7 +4272,7 @@
           <a:lstStyle/>
           <a:p>
             <a:r>
-              <a:rPr sz="3200" b="1" i="0">
+              <a:rPr sz="4800" b="1" i="0">
                 <a:solidFill>
                   <a:srgbClr val="16130A"/>
                 </a:solidFill>
@@ -4291,8 +4291,8 @@
         </p:nvSpPr>
         <p:spPr>
           <a:xfrm>
-            <a:off x="502920" y="1874519"/>
-            <a:ext cx="11155680" cy="731520"/>
+            <a:off x="754380" y="2811779"/>
+            <a:ext cx="16733519" cy="1097280"/>
           </a:xfrm>
           <a:prstGeom prst="rect">
             <a:avLst/>
@@ -4306,7 +4306,7 @@
           <a:lstStyle/>
           <a:p>
             <a:r>
-              <a:rPr sz="1500" b="0" i="0">
+              <a:rPr sz="2250" b="0" i="0">
                 <a:solidFill>
                   <a:srgbClr val="3A3628"/>
                 </a:solidFill>
@@ -4325,8 +4325,8 @@
         </p:nvSpPr>
         <p:spPr>
           <a:xfrm>
-            <a:off x="502920" y="2697480"/>
-            <a:ext cx="5623560" cy="3794760"/>
+            <a:off x="754380" y="4046220"/>
+            <a:ext cx="8435340" cy="5692140"/>
           </a:xfrm>
           <a:prstGeom prst="roundRect">
             <a:avLst>
@@ -4371,8 +4371,8 @@
         </p:nvSpPr>
         <p:spPr>
           <a:xfrm>
-            <a:off x="777240" y="2880360"/>
-            <a:ext cx="5120640" cy="365760"/>
+            <a:off x="1165860" y="4320540"/>
+            <a:ext cx="7680959" cy="548640"/>
           </a:xfrm>
           <a:prstGeom prst="rect">
             <a:avLst/>
@@ -4386,7 +4386,7 @@
           <a:lstStyle/>
           <a:p>
             <a:r>
-              <a:rPr sz="1400" b="1" i="0">
+              <a:rPr sz="1800" b="1" i="0">
                 <a:solidFill>
                   <a:srgbClr val="F8CD1B"/>
                 </a:solidFill>
@@ -4405,8 +4405,8 @@
         </p:nvSpPr>
         <p:spPr>
           <a:xfrm>
-            <a:off x="777240" y="3337560"/>
-            <a:ext cx="1207007" cy="1554480"/>
+            <a:off x="1165860" y="5006340"/>
+            <a:ext cx="1810511" cy="2331720"/>
           </a:xfrm>
           <a:prstGeom prst="rect">
             <a:avLst/>
@@ -4420,7 +4420,7 @@
           <a:lstStyle/>
           <a:p>
             <a:r>
-              <a:rPr sz="2600" b="1" i="0">
+              <a:rPr sz="3900" b="1" i="0">
                 <a:solidFill>
                   <a:srgbClr val="F8CD1B"/>
                 </a:solidFill>
@@ -4436,7 +4436,7 @@
               </a:spcBef>
             </a:pPr>
             <a:r>
-              <a:rPr sz="1400" b="1" i="0">
+              <a:rPr sz="1650" b="1" i="0">
                 <a:solidFill>
                   <a:srgbClr val="FFFFFF"/>
                 </a:solidFill>
@@ -4452,7 +4452,7 @@
               </a:spcBef>
             </a:pPr>
             <a:r>
-              <a:rPr sz="1400" b="0" i="0">
+              <a:rPr sz="1500" b="0" i="0">
                 <a:solidFill>
                   <a:srgbClr val="C9C7BC"/>
                 </a:solidFill>
@@ -4471,8 +4471,8 @@
         </p:nvSpPr>
         <p:spPr>
           <a:xfrm>
-            <a:off x="2075688" y="3337560"/>
-            <a:ext cx="1207007" cy="1554480"/>
+            <a:off x="3113532" y="5006340"/>
+            <a:ext cx="1810511" cy="2331720"/>
           </a:xfrm>
           <a:prstGeom prst="rect">
             <a:avLst/>
@@ -4486,7 +4486,7 @@
           <a:lstStyle/>
           <a:p>
             <a:r>
-              <a:rPr sz="2600" b="1" i="0">
+              <a:rPr sz="3900" b="1" i="0">
                 <a:solidFill>
                   <a:srgbClr val="FFFFFF"/>
                 </a:solidFill>
@@ -4502,7 +4502,7 @@
               </a:spcBef>
             </a:pPr>
             <a:r>
-              <a:rPr sz="1400" b="1" i="0">
+              <a:rPr sz="1650" b="1" i="0">
                 <a:solidFill>
                   <a:srgbClr val="FFFFFF"/>
                 </a:solidFill>
@@ -4518,7 +4518,7 @@
               </a:spcBef>
             </a:pPr>
             <a:r>
-              <a:rPr sz="1400" b="0" i="0">
+              <a:rPr sz="1500" b="0" i="0">
                 <a:solidFill>
                   <a:srgbClr val="C9C7BC"/>
                 </a:solidFill>
@@ -4537,8 +4537,8 @@
         </p:nvSpPr>
         <p:spPr>
           <a:xfrm>
-            <a:off x="3374136" y="3337560"/>
-            <a:ext cx="1207007" cy="1554480"/>
+            <a:off x="5061204" y="5006340"/>
+            <a:ext cx="1810511" cy="2331720"/>
           </a:xfrm>
           <a:prstGeom prst="rect">
             <a:avLst/>
@@ -4552,7 +4552,7 @@
           <a:lstStyle/>
           <a:p>
             <a:r>
-              <a:rPr sz="2600" b="1" i="0">
+              <a:rPr sz="3900" b="1" i="0">
                 <a:solidFill>
                   <a:srgbClr val="FFFFFF"/>
                 </a:solidFill>
@@ -4568,7 +4568,7 @@
               </a:spcBef>
             </a:pPr>
             <a:r>
-              <a:rPr sz="1400" b="1" i="0">
+              <a:rPr sz="1650" b="1" i="0">
                 <a:solidFill>
                   <a:srgbClr val="FFFFFF"/>
                 </a:solidFill>
@@ -4584,7 +4584,7 @@
               </a:spcBef>
             </a:pPr>
             <a:r>
-              <a:rPr sz="1400" b="0" i="0">
+              <a:rPr sz="1500" b="0" i="0">
                 <a:solidFill>
                   <a:srgbClr val="C9C7BC"/>
                 </a:solidFill>
@@ -4603,8 +4603,8 @@
         </p:nvSpPr>
         <p:spPr>
           <a:xfrm>
-            <a:off x="4672583" y="3337560"/>
-            <a:ext cx="1207007" cy="1554480"/>
+            <a:off x="7008875" y="5006340"/>
+            <a:ext cx="1810511" cy="2331720"/>
           </a:xfrm>
           <a:prstGeom prst="rect">
             <a:avLst/>
@@ -4618,7 +4618,7 @@
           <a:lstStyle/>
           <a:p>
             <a:r>
-              <a:rPr sz="2600" b="1" i="0">
+              <a:rPr sz="3900" b="1" i="0">
                 <a:solidFill>
                   <a:srgbClr val="FFFFFF"/>
                 </a:solidFill>
@@ -4634,7 +4634,7 @@
               </a:spcBef>
             </a:pPr>
             <a:r>
-              <a:rPr sz="1400" b="1" i="0">
+              <a:rPr sz="1650" b="1" i="0">
                 <a:solidFill>
                   <a:srgbClr val="FFFFFF"/>
                 </a:solidFill>
@@ -4650,7 +4650,7 @@
               </a:spcBef>
             </a:pPr>
             <a:r>
-              <a:rPr sz="1400" b="0" i="0">
+              <a:rPr sz="1500" b="0" i="0">
                 <a:solidFill>
                   <a:srgbClr val="C9C7BC"/>
                 </a:solidFill>
@@ -4669,8 +4669,8 @@
         </p:nvSpPr>
         <p:spPr>
           <a:xfrm>
-            <a:off x="777240" y="5257800"/>
-            <a:ext cx="5120640" cy="777240"/>
+            <a:off x="1165860" y="7886700"/>
+            <a:ext cx="7680959" cy="1165860"/>
           </a:xfrm>
           <a:prstGeom prst="rect">
             <a:avLst/>
@@ -4684,7 +4684,7 @@
           <a:lstStyle/>
           <a:p>
             <a:r>
-              <a:rPr sz="1400" b="0" i="0">
+              <a:rPr sz="1500" b="0" i="0">
                 <a:solidFill>
                   <a:srgbClr val="C9C7BC"/>
                 </a:solidFill>
@@ -4703,8 +4703,8 @@
         </p:nvSpPr>
         <p:spPr>
           <a:xfrm>
-            <a:off x="6309360" y="2697480"/>
-            <a:ext cx="5394960" cy="3794760"/>
+            <a:off x="9464040" y="4046220"/>
+            <a:ext cx="8092440" cy="5692140"/>
           </a:xfrm>
           <a:prstGeom prst="roundRect">
             <a:avLst>
@@ -4751,8 +4751,8 @@
         </p:nvSpPr>
         <p:spPr>
           <a:xfrm>
-            <a:off x="6537960" y="2852928"/>
-            <a:ext cx="4937760" cy="320040"/>
+            <a:off x="9806940" y="4279392"/>
+            <a:ext cx="7406640" cy="480059"/>
           </a:xfrm>
           <a:prstGeom prst="rect">
             <a:avLst/>
@@ -4766,7 +4766,7 @@
           <a:lstStyle/>
           <a:p>
             <a:r>
-              <a:rPr sz="1400" b="1" i="0">
+              <a:rPr sz="1800" b="1" i="0">
                 <a:solidFill>
                   <a:srgbClr val="7A6100"/>
                 </a:solidFill>
@@ -4785,8 +4785,8 @@
         </p:nvSpPr>
         <p:spPr>
           <a:xfrm>
-            <a:off x="6537960" y="3200400"/>
-            <a:ext cx="4937760" cy="1783080"/>
+            <a:off x="9806940" y="4800600"/>
+            <a:ext cx="7406640" cy="2674620"/>
           </a:xfrm>
           <a:prstGeom prst="rect">
             <a:avLst/>
@@ -4805,7 +4805,7 @@
               </a:spcAft>
             </a:pPr>
             <a:r>
-              <a:rPr sz="1400" b="1" i="0">
+              <a:rPr sz="1800" b="1" i="0">
                 <a:solidFill>
                   <a:srgbClr val="146634"/>
                 </a:solidFill>
@@ -4814,7 +4814,7 @@
               <a:t>1.  </a:t>
             </a:r>
             <a:r>
-              <a:rPr sz="1400" b="1" i="0">
+              <a:rPr sz="1800" b="1" i="0">
                 <a:solidFill>
                   <a:srgbClr val="16130A"/>
                 </a:solidFill>
@@ -4823,7 +4823,7 @@
               <a:t>Intent-led search and category aisles. </a:t>
             </a:r>
             <a:r>
-              <a:rPr sz="1400" b="0" i="0">
+              <a:rPr sz="1800" b="0" i="0">
                 <a:solidFill>
                   <a:srgbClr val="3A3628"/>
                 </a:solidFill>
@@ -4839,7 +4839,7 @@
               </a:spcAft>
             </a:pPr>
             <a:r>
-              <a:rPr sz="1400" b="1" i="0">
+              <a:rPr sz="1800" b="1" i="0">
                 <a:solidFill>
                   <a:srgbClr val="146634"/>
                 </a:solidFill>
@@ -4848,7 +4848,7 @@
               <a:t>2.  </a:t>
             </a:r>
             <a:r>
-              <a:rPr sz="1400" b="1" i="0">
+              <a:rPr sz="1800" b="1" i="0">
                 <a:solidFill>
                   <a:srgbClr val="16130A"/>
                 </a:solidFill>
@@ -4857,7 +4857,7 @@
               <a:t>Home rails tuned to place and time. </a:t>
             </a:r>
             <a:r>
-              <a:rPr sz="1400" b="0" i="0">
+              <a:rPr sz="1800" b="0" i="0">
                 <a:solidFill>
                   <a:srgbClr val="3A3628"/>
                 </a:solidFill>
@@ -4873,7 +4873,7 @@
               </a:spcAft>
             </a:pPr>
             <a:r>
-              <a:rPr sz="1400" b="1" i="0">
+              <a:rPr sz="1800" b="1" i="0">
                 <a:solidFill>
                   <a:srgbClr val="146634"/>
                 </a:solidFill>
@@ -4882,7 +4882,7 @@
               <a:t>3.  </a:t>
             </a:r>
             <a:r>
-              <a:rPr sz="1400" b="1" i="0">
+              <a:rPr sz="1800" b="1" i="0">
                 <a:solidFill>
                   <a:srgbClr val="16130A"/>
                 </a:solidFill>
@@ -4891,7 +4891,7 @@
               <a:t>Complement prompts at cart. </a:t>
             </a:r>
             <a:r>
-              <a:rPr sz="1400" b="0" i="0">
+              <a:rPr sz="1800" b="0" i="0">
                 <a:solidFill>
                   <a:srgbClr val="3A3628"/>
                 </a:solidFill>
@@ -4910,8 +4910,8 @@
         </p:nvSpPr>
         <p:spPr>
           <a:xfrm>
-            <a:off x="6537960" y="5074920"/>
-            <a:ext cx="4937760" cy="914400"/>
+            <a:off x="9806940" y="7612379"/>
+            <a:ext cx="7406640" cy="1371600"/>
           </a:xfrm>
           <a:prstGeom prst="roundRect">
             <a:avLst>
@@ -4958,8 +4958,8 @@
         </p:nvSpPr>
         <p:spPr>
           <a:xfrm>
-            <a:off x="6675120" y="5138928"/>
-            <a:ext cx="4663440" cy="822960"/>
+            <a:off x="10012680" y="7708392"/>
+            <a:ext cx="6995159" cy="1234440"/>
           </a:xfrm>
           <a:prstGeom prst="rect">
             <a:avLst/>
@@ -4973,7 +4973,7 @@
           <a:lstStyle/>
           <a:p>
             <a:r>
-              <a:rPr sz="1400" b="1" i="0">
+              <a:rPr sz="1725" b="1" i="0">
                 <a:solidFill>
                   <a:srgbClr val="16130A"/>
                 </a:solidFill>
@@ -4982,7 +4982,7 @@
               <a:t>The gap this study works in: </a:t>
             </a:r>
             <a:r>
-              <a:rPr sz="1400" b="0" i="0">
+              <a:rPr sz="1725" b="0" i="0">
                 <a:solidFill>
                   <a:srgbClr val="3A3628"/>
                 </a:solidFill>
@@ -5001,8 +5001,8 @@
         </p:nvSpPr>
         <p:spPr>
           <a:xfrm>
-            <a:off x="6537960" y="6016752"/>
-            <a:ext cx="4937760" cy="475488"/>
+            <a:off x="9806940" y="9025128"/>
+            <a:ext cx="7406640" cy="713232"/>
           </a:xfrm>
           <a:prstGeom prst="rect">
             <a:avLst/>
@@ -5016,7 +5016,7 @@
           <a:lstStyle/>
           <a:p>
             <a:r>
-              <a:rPr sz="1400" b="0" i="0">
+              <a:rPr sz="1425" b="0" i="0">
                 <a:solidFill>
                   <a:srgbClr val="6B6857"/>
                 </a:solidFill>
@@ -5054,7 +5054,7 @@
         <p:spPr>
           <a:xfrm>
             <a:off x="0" y="0"/>
-            <a:ext cx="12191695" cy="6858000"/>
+            <a:ext cx="18287542" cy="10287000"/>
           </a:xfrm>
           <a:prstGeom prst="rect">
             <a:avLst/>
@@ -5105,8 +5105,8 @@
         </p:blipFill>
         <p:spPr>
           <a:xfrm>
-            <a:off x="502920" y="320040"/>
-            <a:ext cx="975836" cy="274320"/>
+            <a:off x="754380" y="480059"/>
+            <a:ext cx="1463751" cy="411479"/>
           </a:xfrm>
           <a:prstGeom prst="rect">
             <a:avLst/>
@@ -5121,8 +5121,8 @@
         </p:nvSpPr>
         <p:spPr>
           <a:xfrm>
-            <a:off x="1280160" y="292607"/>
-            <a:ext cx="9601200" cy="365760"/>
+            <a:off x="1920239" y="438911"/>
+            <a:ext cx="14401800" cy="548640"/>
           </a:xfrm>
           <a:prstGeom prst="rect">
             <a:avLst/>
@@ -5136,7 +5136,7 @@
           <a:lstStyle/>
           <a:p>
             <a:r>
-              <a:rPr sz="1400" b="1" i="0">
+              <a:rPr sz="1800" b="1" i="0">
                 <a:solidFill>
                   <a:srgbClr val="7A6100"/>
                 </a:solidFill>
@@ -5155,8 +5155,8 @@
         </p:nvSpPr>
         <p:spPr>
           <a:xfrm>
-            <a:off x="502920" y="685800"/>
-            <a:ext cx="7680960" cy="1005840"/>
+            <a:off x="754380" y="1028700"/>
+            <a:ext cx="11521440" cy="1508760"/>
           </a:xfrm>
           <a:prstGeom prst="rect">
             <a:avLst/>
@@ -5170,7 +5170,7 @@
           <a:lstStyle/>
           <a:p>
             <a:r>
-              <a:rPr sz="2100" b="1" i="0">
+              <a:rPr sz="3150" b="1" i="0">
                 <a:solidFill>
                   <a:srgbClr val="16130A"/>
                 </a:solidFill>
@@ -5189,8 +5189,8 @@
         </p:nvSpPr>
         <p:spPr>
           <a:xfrm>
-            <a:off x="8549640" y="548640"/>
-            <a:ext cx="3154680" cy="1051560"/>
+            <a:off x="12824459" y="822959"/>
+            <a:ext cx="4732020" cy="1577339"/>
           </a:xfrm>
           <a:prstGeom prst="roundRect">
             <a:avLst>
@@ -5235,8 +5235,8 @@
         </p:nvSpPr>
         <p:spPr>
           <a:xfrm>
-            <a:off x="8686800" y="612648"/>
-            <a:ext cx="2880360" cy="914400"/>
+            <a:off x="13030200" y="918972"/>
+            <a:ext cx="4320540" cy="1371600"/>
           </a:xfrm>
           <a:prstGeom prst="rect">
             <a:avLst/>
@@ -5250,7 +5250,7 @@
           <a:lstStyle/>
           <a:p>
             <a:r>
-              <a:rPr sz="1400" b="1" i="0">
+              <a:rPr sz="1575" b="1" i="0">
                 <a:solidFill>
                   <a:srgbClr val="16130A"/>
                 </a:solidFill>
@@ -5269,8 +5269,8 @@
         </p:nvSpPr>
         <p:spPr>
           <a:xfrm>
-            <a:off x="502920" y="1783080"/>
-            <a:ext cx="4480560" cy="1737360"/>
+            <a:off x="754380" y="2674620"/>
+            <a:ext cx="6720840" cy="2606039"/>
           </a:xfrm>
           <a:prstGeom prst="roundRect">
             <a:avLst>
@@ -5315,8 +5315,8 @@
         </p:nvSpPr>
         <p:spPr>
           <a:xfrm>
-            <a:off x="685800" y="1901952"/>
-            <a:ext cx="4114800" cy="1508760"/>
+            <a:off x="1028700" y="2852928"/>
+            <a:ext cx="6172200" cy="2263139"/>
           </a:xfrm>
           <a:prstGeom prst="rect">
             <a:avLst/>
@@ -5330,7 +5330,7 @@
           <a:lstStyle/>
           <a:p>
             <a:r>
-              <a:rPr sz="1400" b="1" i="0">
+              <a:rPr sz="1575" b="1" i="0">
                 <a:solidFill>
                   <a:srgbClr val="F8CD1B"/>
                 </a:solidFill>
@@ -5346,7 +5346,7 @@
               </a:spcBef>
             </a:pPr>
             <a:r>
-              <a:rPr sz="1450" b="1" i="0">
+              <a:rPr sz="2175" b="1" i="0">
                 <a:solidFill>
                   <a:srgbClr val="FFFFFF"/>
                 </a:solidFill>
@@ -5362,7 +5362,7 @@
               </a:spcBef>
             </a:pPr>
             <a:r>
-              <a:rPr sz="1400" b="0" i="0">
+              <a:rPr sz="1500" b="0" i="0">
                 <a:solidFill>
                   <a:srgbClr val="C9C7BC"/>
                 </a:solidFill>
@@ -5381,8 +5381,8 @@
         </p:nvSpPr>
         <p:spPr>
           <a:xfrm>
-            <a:off x="502920" y="3657600"/>
-            <a:ext cx="4480560" cy="2194560"/>
+            <a:off x="754380" y="5486400"/>
+            <a:ext cx="6720840" cy="3291839"/>
           </a:xfrm>
           <a:prstGeom prst="roundRect">
             <a:avLst>
@@ -5429,8 +5429,8 @@
         </p:nvSpPr>
         <p:spPr>
           <a:xfrm>
-            <a:off x="685800" y="3776472"/>
-            <a:ext cx="4114800" cy="1965960"/>
+            <a:off x="1028700" y="5664708"/>
+            <a:ext cx="6172200" cy="2948939"/>
           </a:xfrm>
           <a:prstGeom prst="rect">
             <a:avLst/>
@@ -5444,7 +5444,7 @@
           <a:lstStyle/>
           <a:p>
             <a:r>
-              <a:rPr sz="1400" b="1" i="0">
+              <a:rPr sz="1575" b="1" i="0">
                 <a:solidFill>
                   <a:srgbClr val="7A6100"/>
                 </a:solidFill>
@@ -5460,7 +5460,7 @@
               </a:spcBef>
             </a:pPr>
             <a:r>
-              <a:rPr sz="1400" b="1" i="0">
+              <a:rPr sz="2025" b="1" i="0">
                 <a:solidFill>
                   <a:srgbClr val="16130A"/>
                 </a:solidFill>
@@ -5476,7 +5476,7 @@
               </a:spcBef>
             </a:pPr>
             <a:r>
-              <a:rPr sz="1400" b="0" i="0">
+              <a:rPr sz="1650" b="0" i="0">
                 <a:solidFill>
                   <a:srgbClr val="3A3628"/>
                 </a:solidFill>
@@ -5495,8 +5495,8 @@
         </p:nvSpPr>
         <p:spPr>
           <a:xfrm>
-            <a:off x="5120640" y="1783080"/>
-            <a:ext cx="6583680" cy="2103120"/>
+            <a:off x="7680959" y="2674620"/>
+            <a:ext cx="9875520" cy="3154679"/>
           </a:xfrm>
           <a:prstGeom prst="roundRect">
             <a:avLst>
@@ -5543,8 +5543,8 @@
         </p:nvSpPr>
         <p:spPr>
           <a:xfrm>
-            <a:off x="5303520" y="1874519"/>
-            <a:ext cx="6217920" cy="274320"/>
+            <a:off x="7955279" y="2811779"/>
+            <a:ext cx="9326880" cy="411479"/>
           </a:xfrm>
           <a:prstGeom prst="rect">
             <a:avLst/>
@@ -5558,7 +5558,7 @@
           <a:lstStyle/>
           <a:p>
             <a:r>
-              <a:rPr sz="1400" b="1" i="0">
+              <a:rPr sz="1650" b="1" i="0">
                 <a:solidFill>
                   <a:srgbClr val="7A6100"/>
                 </a:solidFill>
@@ -5578,8 +5578,8 @@
           <p:nvPr/>
         </p:nvGraphicFramePr>
         <p:xfrm>
-          <a:off x="5303520" y="2194560"/>
-          <a:ext cx="6217918" cy="1600200"/>
+          <a:off x="7955279" y="3291839"/>
+          <a:ext cx="9326878" cy="2400300"/>
         </p:xfrm>
         <a:graphic>
           <a:graphicData uri="http://schemas.openxmlformats.org/drawingml/2006/table">
@@ -5588,18 +5588,18 @@
                 <a:tableStyleId>{5C22544A-7EE6-4342-B048-85BDC9FD1C3A}</a:tableStyleId>
               </a:tblPr>
               <a:tblGrid>
-                <a:gridCol w="1404046"/>
-                <a:gridCol w="2908381"/>
-                <a:gridCol w="1905491"/>
+                <a:gridCol w="2106069"/>
+                <a:gridCol w="4362572"/>
+                <a:gridCol w="2858237"/>
               </a:tblGrid>
-              <a:tr h="400050">
+              <a:tr h="600075">
                 <a:tc>
                   <a:txBody>
                     <a:bodyPr wrap="square"/>
                     <a:lstStyle/>
                     <a:p>
                       <a:r>
-                        <a:rPr sz="1400" b="1" i="0">
+                        <a:rPr sz="1575" b="1" i="0">
                           <a:solidFill>
                             <a:srgbClr val="FFFFFF"/>
                           </a:solidFill>
@@ -5621,7 +5621,7 @@
                     <a:lstStyle/>
                     <a:p>
                       <a:r>
-                        <a:rPr sz="1400" b="1" i="0">
+                        <a:rPr sz="1575" b="1" i="0">
                           <a:solidFill>
                             <a:srgbClr val="FFFFFF"/>
                           </a:solidFill>
@@ -5643,7 +5643,7 @@
                     <a:lstStyle/>
                     <a:p>
                       <a:r>
-                        <a:rPr sz="1400" b="1" i="0">
+                        <a:rPr sz="1575" b="1" i="0">
                           <a:solidFill>
                             <a:srgbClr val="FFFFFF"/>
                           </a:solidFill>
@@ -5660,14 +5660,14 @@
                   </a:tcPr>
                 </a:tc>
               </a:tr>
-              <a:tr h="400050">
+              <a:tr h="600075">
                 <a:tc>
                   <a:txBody>
                     <a:bodyPr wrap="square"/>
                     <a:lstStyle/>
                     <a:p>
                       <a:r>
-                        <a:rPr sz="1400" b="1" i="0">
+                        <a:rPr sz="1425" b="1" i="0">
                           <a:solidFill>
                             <a:srgbClr val="16130A"/>
                           </a:solidFill>
@@ -5689,7 +5689,7 @@
                     <a:lstStyle/>
                     <a:p>
                       <a:r>
-                        <a:rPr sz="1400" b="0" i="0">
+                        <a:rPr sz="1425" b="0" i="0">
                           <a:solidFill>
                             <a:srgbClr val="3A3628"/>
                           </a:solidFill>
@@ -5711,7 +5711,7 @@
                     <a:lstStyle/>
                     <a:p>
                       <a:r>
-                        <a:rPr sz="1400" b="1" i="0">
+                        <a:rPr sz="1425" b="1" i="0">
                           <a:solidFill>
                             <a:srgbClr val="16130A"/>
                           </a:solidFill>
@@ -5728,14 +5728,14 @@
                   </a:tcPr>
                 </a:tc>
               </a:tr>
-              <a:tr h="400050">
+              <a:tr h="600075">
                 <a:tc>
                   <a:txBody>
                     <a:bodyPr wrap="square"/>
                     <a:lstStyle/>
                     <a:p>
                       <a:r>
-                        <a:rPr sz="1400" b="1" i="0">
+                        <a:rPr sz="1425" b="1" i="0">
                           <a:solidFill>
                             <a:srgbClr val="16130A"/>
                           </a:solidFill>
@@ -5757,7 +5757,7 @@
                     <a:lstStyle/>
                     <a:p>
                       <a:r>
-                        <a:rPr sz="1400" b="0" i="0">
+                        <a:rPr sz="1425" b="0" i="0">
                           <a:solidFill>
                             <a:srgbClr val="3A3628"/>
                           </a:solidFill>
@@ -5779,7 +5779,7 @@
                     <a:lstStyle/>
                     <a:p>
                       <a:r>
-                        <a:rPr sz="1400" b="1" i="0">
+                        <a:rPr sz="1425" b="1" i="0">
                           <a:solidFill>
                             <a:srgbClr val="16130A"/>
                           </a:solidFill>
@@ -5796,14 +5796,14 @@
                   </a:tcPr>
                 </a:tc>
               </a:tr>
-              <a:tr h="400050">
+              <a:tr h="600075">
                 <a:tc>
                   <a:txBody>
                     <a:bodyPr wrap="square"/>
                     <a:lstStyle/>
                     <a:p>
                       <a:r>
-                        <a:rPr sz="1400" b="1" i="0">
+                        <a:rPr sz="1425" b="1" i="0">
                           <a:solidFill>
                             <a:srgbClr val="16130A"/>
                           </a:solidFill>
@@ -5825,7 +5825,7 @@
                     <a:lstStyle/>
                     <a:p>
                       <a:r>
-                        <a:rPr sz="1400" b="0" i="0">
+                        <a:rPr sz="1425" b="0" i="0">
                           <a:solidFill>
                             <a:srgbClr val="3A3628"/>
                           </a:solidFill>
@@ -5847,7 +5847,7 @@
                     <a:lstStyle/>
                     <a:p>
                       <a:r>
-                        <a:rPr sz="1400" b="1" i="0">
+                        <a:rPr sz="1425" b="1" i="0">
                           <a:solidFill>
                             <a:srgbClr val="16130A"/>
                           </a:solidFill>
@@ -5876,8 +5876,8 @@
         </p:nvSpPr>
         <p:spPr>
           <a:xfrm>
-            <a:off x="5120640" y="4023360"/>
-            <a:ext cx="6583680" cy="1828800"/>
+            <a:off x="7680959" y="6035040"/>
+            <a:ext cx="9875520" cy="2743200"/>
           </a:xfrm>
           <a:prstGeom prst="roundRect">
             <a:avLst>
@@ -5924,8 +5924,8 @@
         </p:nvSpPr>
         <p:spPr>
           <a:xfrm>
-            <a:off x="5303520" y="4114800"/>
-            <a:ext cx="6217920" cy="1691640"/>
+            <a:off x="7955279" y="6172200"/>
+            <a:ext cx="9326880" cy="2537460"/>
           </a:xfrm>
           <a:prstGeom prst="rect">
             <a:avLst/>
@@ -5939,7 +5939,7 @@
           <a:lstStyle/>
           <a:p>
             <a:r>
-              <a:rPr sz="1400" b="1" i="0">
+              <a:rPr sz="1650" b="1" i="0">
                 <a:solidFill>
                   <a:srgbClr val="7A6100"/>
                 </a:solidFill>
@@ -5955,7 +5955,7 @@
               </a:spcBef>
             </a:pPr>
             <a:r>
-              <a:rPr sz="1400" b="1" i="0">
+              <a:rPr sz="1500" b="1" i="0">
                 <a:solidFill>
                   <a:srgbClr val="16130A"/>
                 </a:solidFill>
@@ -5964,7 +5964,7 @@
               <a:t>Return and refund rate </a:t>
             </a:r>
             <a:r>
-              <a:rPr sz="1400" b="0" i="0">
+              <a:rPr sz="1500" b="0" i="0">
                 <a:solidFill>
                   <a:srgbClr val="3A3628"/>
                 </a:solidFill>
@@ -5980,7 +5980,7 @@
               </a:spcBef>
             </a:pPr>
             <a:r>
-              <a:rPr sz="1400" b="1" i="0">
+              <a:rPr sz="1500" b="1" i="0">
                 <a:solidFill>
                   <a:srgbClr val="16130A"/>
                 </a:solidFill>
@@ -5989,7 +5989,7 @@
               <a:t>Complaint rate </a:t>
             </a:r>
             <a:r>
-              <a:rPr sz="1400" b="0" i="0">
+              <a:rPr sz="1500" b="0" i="0">
                 <a:solidFill>
                   <a:srgbClr val="3A3628"/>
                 </a:solidFill>
@@ -6005,7 +6005,7 @@
               </a:spcBef>
             </a:pPr>
             <a:r>
-              <a:rPr sz="1400" b="1" i="0">
+              <a:rPr sz="1500" b="1" i="0">
                 <a:solidFill>
                   <a:srgbClr val="16130A"/>
                 </a:solidFill>
@@ -6014,7 +6014,7 @@
               <a:t>Order frequency </a:t>
             </a:r>
             <a:r>
-              <a:rPr sz="1400" b="0" i="0">
+              <a:rPr sz="1500" b="0" i="0">
                 <a:solidFill>
                   <a:srgbClr val="3A3628"/>
                 </a:solidFill>
@@ -6030,7 +6030,7 @@
               </a:spcBef>
             </a:pPr>
             <a:r>
-              <a:rPr sz="1400" b="1" i="0">
+              <a:rPr sz="1500" b="1" i="0">
                 <a:solidFill>
                   <a:srgbClr val="16130A"/>
                 </a:solidFill>
@@ -6039,7 +6039,7 @@
               <a:t>Copy audit </a:t>
             </a:r>
             <a:r>
-              <a:rPr sz="1400" b="0" i="0">
+              <a:rPr sz="1500" b="0" i="0">
                 <a:solidFill>
                   <a:srgbClr val="3A3628"/>
                 </a:solidFill>
@@ -6058,8 +6058,8 @@
         </p:nvSpPr>
         <p:spPr>
           <a:xfrm>
-            <a:off x="502920" y="5943600"/>
-            <a:ext cx="4572000" cy="274320"/>
+            <a:off x="754380" y="8915400"/>
+            <a:ext cx="6858000" cy="411479"/>
           </a:xfrm>
           <a:prstGeom prst="rect">
             <a:avLst/>
@@ -6073,7 +6073,7 @@
           <a:lstStyle/>
           <a:p>
             <a:r>
-              <a:rPr sz="1400" b="1" i="0">
+              <a:rPr sz="1650" b="1" i="0">
                 <a:solidFill>
                   <a:srgbClr val="7A6100"/>
                 </a:solidFill>
@@ -6092,8 +6092,8 @@
         </p:nvSpPr>
         <p:spPr>
           <a:xfrm>
-            <a:off x="502920" y="6263640"/>
-            <a:ext cx="3657600" cy="548640"/>
+            <a:off x="754380" y="9395459"/>
+            <a:ext cx="5486400" cy="822959"/>
           </a:xfrm>
           <a:prstGeom prst="roundRect">
             <a:avLst>
@@ -6140,8 +6140,8 @@
         </p:nvSpPr>
         <p:spPr>
           <a:xfrm>
-            <a:off x="594360" y="6281928"/>
-            <a:ext cx="3474720" cy="512064"/>
+            <a:off x="891540" y="9422892"/>
+            <a:ext cx="5212079" cy="768096"/>
           </a:xfrm>
           <a:prstGeom prst="rect">
             <a:avLst/>
@@ -6174,8 +6174,8 @@
         </p:nvSpPr>
         <p:spPr>
           <a:xfrm>
-            <a:off x="4297680" y="6263640"/>
-            <a:ext cx="3657600" cy="548640"/>
+            <a:off x="6446520" y="9395459"/>
+            <a:ext cx="5486400" cy="822959"/>
           </a:xfrm>
           <a:prstGeom prst="roundRect">
             <a:avLst>
@@ -6222,8 +6222,8 @@
         </p:nvSpPr>
         <p:spPr>
           <a:xfrm>
-            <a:off x="4389120" y="6281928"/>
-            <a:ext cx="3474720" cy="512064"/>
+            <a:off x="6583679" y="9422892"/>
+            <a:ext cx="5212079" cy="768096"/>
           </a:xfrm>
           <a:prstGeom prst="rect">
             <a:avLst/>
@@ -6256,8 +6256,8 @@
         </p:nvSpPr>
         <p:spPr>
           <a:xfrm>
-            <a:off x="8092440" y="6263640"/>
-            <a:ext cx="3657600" cy="548640"/>
+            <a:off x="12138660" y="9395459"/>
+            <a:ext cx="5486400" cy="822959"/>
           </a:xfrm>
           <a:prstGeom prst="roundRect">
             <a:avLst>
@@ -6304,8 +6304,8 @@
         </p:nvSpPr>
         <p:spPr>
           <a:xfrm>
-            <a:off x="8183880" y="6281928"/>
-            <a:ext cx="3474720" cy="512064"/>
+            <a:off x="12275820" y="9422892"/>
+            <a:ext cx="5212079" cy="768096"/>
           </a:xfrm>
           <a:prstGeom prst="rect">
             <a:avLst/>
@@ -6357,7 +6357,7 @@
         <p:spPr>
           <a:xfrm>
             <a:off x="0" y="0"/>
-            <a:ext cx="12191695" cy="6858000"/>
+            <a:ext cx="18287542" cy="10287000"/>
           </a:xfrm>
           <a:prstGeom prst="rect">
             <a:avLst/>
@@ -6408,8 +6408,8 @@
         </p:blipFill>
         <p:spPr>
           <a:xfrm>
-            <a:off x="502920" y="320040"/>
-            <a:ext cx="975836" cy="274320"/>
+            <a:off x="754380" y="480059"/>
+            <a:ext cx="1463751" cy="411479"/>
           </a:xfrm>
           <a:prstGeom prst="rect">
             <a:avLst/>
@@ -6424,8 +6424,8 @@
         </p:nvSpPr>
         <p:spPr>
           <a:xfrm>
-            <a:off x="1280160" y="292607"/>
-            <a:ext cx="9601200" cy="365760"/>
+            <a:off x="1920239" y="438911"/>
+            <a:ext cx="14401800" cy="548640"/>
           </a:xfrm>
           <a:prstGeom prst="rect">
             <a:avLst/>
@@ -6439,7 +6439,7 @@
           <a:lstStyle/>
           <a:p>
             <a:r>
-              <a:rPr sz="1400" b="1" i="0">
+              <a:rPr sz="1950" b="1" i="0">
                 <a:solidFill>
                   <a:srgbClr val="7A6100"/>
                 </a:solidFill>
@@ -6458,8 +6458,8 @@
         </p:nvSpPr>
         <p:spPr>
           <a:xfrm>
-            <a:off x="502920" y="713232"/>
-            <a:ext cx="10607040" cy="1234440"/>
+            <a:off x="754380" y="1069848"/>
+            <a:ext cx="15910559" cy="1851660"/>
           </a:xfrm>
           <a:prstGeom prst="rect">
             <a:avLst/>
@@ -6473,7 +6473,7 @@
           <a:lstStyle/>
           <a:p>
             <a:r>
-              <a:rPr sz="2500" b="1" i="0">
+              <a:rPr sz="3750" b="1" i="0">
                 <a:solidFill>
                   <a:srgbClr val="16130A"/>
                 </a:solidFill>
@@ -6492,8 +6492,8 @@
         </p:nvSpPr>
         <p:spPr>
           <a:xfrm>
-            <a:off x="502920" y="1965960"/>
-            <a:ext cx="5120640" cy="4206240"/>
+            <a:off x="754380" y="2948939"/>
+            <a:ext cx="7680959" cy="6309359"/>
           </a:xfrm>
           <a:prstGeom prst="roundRect">
             <a:avLst>
@@ -6538,8 +6538,8 @@
         </p:nvSpPr>
         <p:spPr>
           <a:xfrm>
-            <a:off x="777240" y="2194560"/>
-            <a:ext cx="4572000" cy="1463040"/>
+            <a:off x="1165860" y="3291839"/>
+            <a:ext cx="6858000" cy="2194560"/>
           </a:xfrm>
           <a:prstGeom prst="rect">
             <a:avLst/>
@@ -6553,7 +6553,7 @@
           <a:lstStyle/>
           <a:p>
             <a:r>
-              <a:rPr sz="6000" b="1" i="0">
+              <a:rPr sz="9000" b="1" i="0">
                 <a:solidFill>
                   <a:srgbClr val="F8CD1B"/>
                 </a:solidFill>
@@ -6572,8 +6572,8 @@
         </p:nvSpPr>
         <p:spPr>
           <a:xfrm>
-            <a:off x="777240" y="3429000"/>
-            <a:ext cx="4572000" cy="1463040"/>
+            <a:off x="1165860" y="5143500"/>
+            <a:ext cx="6858000" cy="2194560"/>
           </a:xfrm>
           <a:prstGeom prst="rect">
             <a:avLst/>
@@ -6587,7 +6587,7 @@
           <a:lstStyle/>
           <a:p>
             <a:r>
-              <a:rPr sz="1700" b="1" i="0">
+              <a:rPr sz="2550" b="1" i="0">
                 <a:solidFill>
                   <a:srgbClr val="FFFFFF"/>
                 </a:solidFill>
@@ -6606,8 +6606,8 @@
         </p:nvSpPr>
         <p:spPr>
           <a:xfrm>
-            <a:off x="777240" y="5394960"/>
-            <a:ext cx="4572000" cy="640080"/>
+            <a:off x="1165860" y="8092440"/>
+            <a:ext cx="6858000" cy="960119"/>
           </a:xfrm>
           <a:prstGeom prst="rect">
             <a:avLst/>
@@ -6621,7 +6621,7 @@
           <a:lstStyle/>
           <a:p>
             <a:r>
-              <a:rPr sz="1400" b="0" i="0">
+              <a:rPr sz="1650" b="0" i="0">
                 <a:solidFill>
                   <a:srgbClr val="C9C7BC"/>
                 </a:solidFill>
@@ -6640,8 +6640,8 @@
         </p:nvSpPr>
         <p:spPr>
           <a:xfrm>
-            <a:off x="5806440" y="1965960"/>
-            <a:ext cx="5897880" cy="2011680"/>
+            <a:off x="8709659" y="2948939"/>
+            <a:ext cx="8846820" cy="3017520"/>
           </a:xfrm>
           <a:prstGeom prst="roundRect">
             <a:avLst>
@@ -6688,8 +6688,8 @@
         </p:nvSpPr>
         <p:spPr>
           <a:xfrm>
-            <a:off x="6035040" y="2103120"/>
-            <a:ext cx="5486400" cy="1737360"/>
+            <a:off x="9052559" y="3154679"/>
+            <a:ext cx="8229600" cy="2606039"/>
           </a:xfrm>
           <a:prstGeom prst="rect">
             <a:avLst/>
@@ -6703,7 +6703,7 @@
           <a:lstStyle/>
           <a:p>
             <a:r>
-              <a:rPr sz="1500" b="1" i="0">
+              <a:rPr sz="2250" b="1" i="0">
                 <a:solidFill>
                   <a:srgbClr val="16130A"/>
                 </a:solidFill>
@@ -6719,7 +6719,7 @@
               </a:spcBef>
             </a:pPr>
             <a:r>
-              <a:rPr sz="1400" b="0" i="0">
+              <a:rPr sz="1875" b="0" i="0">
                 <a:solidFill>
                   <a:srgbClr val="3A3628"/>
                 </a:solidFill>
@@ -6738,8 +6738,8 @@
         </p:nvSpPr>
         <p:spPr>
           <a:xfrm>
-            <a:off x="5806440" y="4114800"/>
-            <a:ext cx="5897880" cy="2331720"/>
+            <a:off x="8709659" y="6172200"/>
+            <a:ext cx="8846820" cy="3497579"/>
           </a:xfrm>
           <a:prstGeom prst="roundRect">
             <a:avLst>
@@ -6786,8 +6786,8 @@
         </p:nvSpPr>
         <p:spPr>
           <a:xfrm>
-            <a:off x="6035040" y="4224528"/>
-            <a:ext cx="5486400" cy="2148840"/>
+            <a:off x="9052559" y="6336792"/>
+            <a:ext cx="8229600" cy="3223260"/>
           </a:xfrm>
           <a:prstGeom prst="rect">
             <a:avLst/>
@@ -6801,7 +6801,7 @@
           <a:lstStyle/>
           <a:p>
             <a:r>
-              <a:rPr sz="1500" b="1" i="0">
+              <a:rPr sz="2250" b="1" i="0">
                 <a:solidFill>
                   <a:srgbClr val="16130A"/>
                 </a:solidFill>
@@ -6817,7 +6817,7 @@
               </a:spcBef>
             </a:pPr>
             <a:r>
-              <a:rPr sz="1400" b="0" i="0">
+              <a:rPr sz="1650" b="0" i="0">
                 <a:solidFill>
                   <a:srgbClr val="3A3628"/>
                 </a:solidFill>
@@ -6833,7 +6833,7 @@
               </a:spcBef>
             </a:pPr>
             <a:r>
-              <a:rPr sz="1400" b="0" i="0">
+              <a:rPr sz="1650" b="0" i="0">
                 <a:solidFill>
                   <a:srgbClr val="3A3628"/>
                 </a:solidFill>
@@ -6849,7 +6849,7 @@
               </a:spcBef>
             </a:pPr>
             <a:r>
-              <a:rPr sz="1400" b="1" i="0">
+              <a:rPr sz="1575" b="1" i="0">
                 <a:solidFill>
                   <a:srgbClr val="7A6100"/>
                 </a:solidFill>
@@ -6858,7 +6858,7 @@
               <a:t>Caveat: </a:t>
             </a:r>
             <a:r>
-              <a:rPr sz="1400" b="0" i="0">
+              <a:rPr sz="1575" b="0" i="0">
                 <a:solidFill>
                   <a:srgbClr val="3A3628"/>
                 </a:solidFill>
@@ -6896,7 +6896,7 @@
         <p:spPr>
           <a:xfrm>
             <a:off x="0" y="0"/>
-            <a:ext cx="12191695" cy="6858000"/>
+            <a:ext cx="18287542" cy="10287000"/>
           </a:xfrm>
           <a:prstGeom prst="rect">
             <a:avLst/>
@@ -6947,8 +6947,8 @@
         </p:blipFill>
         <p:spPr>
           <a:xfrm>
-            <a:off x="502920" y="320040"/>
-            <a:ext cx="975836" cy="274320"/>
+            <a:off x="754380" y="480059"/>
+            <a:ext cx="1463751" cy="411479"/>
           </a:xfrm>
           <a:prstGeom prst="rect">
             <a:avLst/>
@@ -6963,8 +6963,8 @@
         </p:nvSpPr>
         <p:spPr>
           <a:xfrm>
-            <a:off x="1280160" y="292607"/>
-            <a:ext cx="9601200" cy="365760"/>
+            <a:off x="1920239" y="438911"/>
+            <a:ext cx="14401800" cy="548640"/>
           </a:xfrm>
           <a:prstGeom prst="rect">
             <a:avLst/>
@@ -6978,7 +6978,7 @@
           <a:lstStyle/>
           <a:p>
             <a:r>
-              <a:rPr sz="1400" b="1" i="0">
+              <a:rPr sz="1800" b="1" i="0">
                 <a:solidFill>
                   <a:srgbClr val="7A6100"/>
                 </a:solidFill>
@@ -6997,8 +6997,8 @@
         </p:nvSpPr>
         <p:spPr>
           <a:xfrm>
-            <a:off x="502920" y="685800"/>
-            <a:ext cx="8503920" cy="1005840"/>
+            <a:off x="754380" y="1028700"/>
+            <a:ext cx="12755880" cy="1508760"/>
           </a:xfrm>
           <a:prstGeom prst="rect">
             <a:avLst/>
@@ -7012,7 +7012,7 @@
           <a:lstStyle/>
           <a:p>
             <a:r>
-              <a:rPr sz="2100" b="1" i="0">
+              <a:rPr sz="3150" b="1" i="0">
                 <a:solidFill>
                   <a:srgbClr val="16130A"/>
                 </a:solidFill>
@@ -7031,8 +7031,8 @@
         </p:nvSpPr>
         <p:spPr>
           <a:xfrm>
-            <a:off x="9144000" y="731520"/>
-            <a:ext cx="2560320" cy="822960"/>
+            <a:off x="13716000" y="1097280"/>
+            <a:ext cx="3840479" cy="1234440"/>
           </a:xfrm>
           <a:prstGeom prst="roundRect">
             <a:avLst>
@@ -7079,8 +7079,8 @@
         </p:nvSpPr>
         <p:spPr>
           <a:xfrm>
-            <a:off x="9281160" y="786384"/>
-            <a:ext cx="2286000" cy="731520"/>
+            <a:off x="13921740" y="1179576"/>
+            <a:ext cx="3429000" cy="1097280"/>
           </a:xfrm>
           <a:prstGeom prst="rect">
             <a:avLst/>
@@ -7105,11 +7105,12 @@
           </a:p>
           <a:p>
             <a:r>
-              <a:rPr sz="1400" b="1" i="0">
+              <a:rPr sz="1800" b="1" i="0">
                 <a:solidFill>
                   <a:srgbClr val="16130A"/>
                 </a:solidFill>
                 <a:latin typeface="Arial"/>
+                <a:hlinkClick r:id="rId3"/>
               </a:rPr>
               <a:t>Open the live extractor →</a:t>
             </a:r>
@@ -7124,8 +7125,8 @@
         </p:nvSpPr>
         <p:spPr>
           <a:xfrm>
-            <a:off x="502920" y="1783080"/>
-            <a:ext cx="11201400" cy="914400"/>
+            <a:off x="754380" y="2674620"/>
+            <a:ext cx="16802100" cy="1371600"/>
           </a:xfrm>
           <a:prstGeom prst="roundRect">
             <a:avLst>
@@ -7172,8 +7173,8 @@
         </p:nvSpPr>
         <p:spPr>
           <a:xfrm>
-            <a:off x="685800" y="1856231"/>
-            <a:ext cx="1828800" cy="777240"/>
+            <a:off x="1028700" y="2784348"/>
+            <a:ext cx="2743200" cy="1165860"/>
           </a:xfrm>
           <a:prstGeom prst="rect">
             <a:avLst/>
@@ -7187,7 +7188,7 @@
           <a:lstStyle/>
           <a:p>
             <a:r>
-              <a:rPr sz="2000" b="1" i="0">
+              <a:rPr sz="3000" b="1" i="0">
                 <a:solidFill>
                   <a:srgbClr val="16130A"/>
                 </a:solidFill>
@@ -7198,7 +7199,7 @@
           </a:p>
           <a:p>
             <a:r>
-              <a:rPr sz="1400" b="1" i="0">
+              <a:rPr sz="1425" b="1" i="0">
                 <a:solidFill>
                   <a:srgbClr val="5A5545"/>
                 </a:solidFill>
@@ -7217,8 +7218,8 @@
         </p:nvSpPr>
         <p:spPr>
           <a:xfrm>
-            <a:off x="2331720" y="2011680"/>
-            <a:ext cx="365760" cy="365760"/>
+            <a:off x="3497579" y="3017520"/>
+            <a:ext cx="548640" cy="548640"/>
           </a:xfrm>
           <a:prstGeom prst="rect">
             <a:avLst/>
@@ -7232,7 +7233,7 @@
           <a:lstStyle/>
           <a:p>
             <a:r>
-              <a:rPr sz="1600" b="1" i="0">
+              <a:rPr sz="2400" b="1" i="0">
                 <a:solidFill>
                   <a:srgbClr val="B9A45A"/>
                 </a:solidFill>
@@ -7251,8 +7252,8 @@
         </p:nvSpPr>
         <p:spPr>
           <a:xfrm>
-            <a:off x="2651760" y="1856231"/>
-            <a:ext cx="1828800" cy="777240"/>
+            <a:off x="3977639" y="2784348"/>
+            <a:ext cx="2743200" cy="1165860"/>
           </a:xfrm>
           <a:prstGeom prst="rect">
             <a:avLst/>
@@ -7266,7 +7267,7 @@
           <a:lstStyle/>
           <a:p>
             <a:r>
-              <a:rPr sz="2000" b="1" i="0">
+              <a:rPr sz="3000" b="1" i="0">
                 <a:solidFill>
                   <a:srgbClr val="16130A"/>
                 </a:solidFill>
@@ -7277,7 +7278,7 @@
           </a:p>
           <a:p>
             <a:r>
-              <a:rPr sz="1400" b="1" i="0">
+              <a:rPr sz="1425" b="1" i="0">
                 <a:solidFill>
                   <a:srgbClr val="5A5545"/>
                 </a:solidFill>
@@ -7296,8 +7297,8 @@
         </p:nvSpPr>
         <p:spPr>
           <a:xfrm>
-            <a:off x="4297680" y="2011680"/>
-            <a:ext cx="365760" cy="365760"/>
+            <a:off x="6446520" y="3017520"/>
+            <a:ext cx="548640" cy="548640"/>
           </a:xfrm>
           <a:prstGeom prst="rect">
             <a:avLst/>
@@ -7311,7 +7312,7 @@
           <a:lstStyle/>
           <a:p>
             <a:r>
-              <a:rPr sz="1600" b="1" i="0">
+              <a:rPr sz="2400" b="1" i="0">
                 <a:solidFill>
                   <a:srgbClr val="B9A45A"/>
                 </a:solidFill>
@@ -7330,8 +7331,8 @@
         </p:nvSpPr>
         <p:spPr>
           <a:xfrm>
-            <a:off x="4617720" y="1856231"/>
-            <a:ext cx="1828800" cy="777240"/>
+            <a:off x="6926579" y="2784348"/>
+            <a:ext cx="2743200" cy="1165860"/>
           </a:xfrm>
           <a:prstGeom prst="rect">
             <a:avLst/>
@@ -7345,7 +7346,7 @@
           <a:lstStyle/>
           <a:p>
             <a:r>
-              <a:rPr sz="2000" b="1" i="0">
+              <a:rPr sz="3000" b="1" i="0">
                 <a:solidFill>
                   <a:srgbClr val="7A6100"/>
                 </a:solidFill>
@@ -7356,7 +7357,7 @@
           </a:p>
           <a:p>
             <a:r>
-              <a:rPr sz="1400" b="1" i="0">
+              <a:rPr sz="1425" b="1" i="0">
                 <a:solidFill>
                   <a:srgbClr val="5A5545"/>
                 </a:solidFill>
@@ -7375,8 +7376,8 @@
         </p:nvSpPr>
         <p:spPr>
           <a:xfrm>
-            <a:off x="6675120" y="1847088"/>
-            <a:ext cx="4846320" cy="685800"/>
+            <a:off x="10012680" y="2770632"/>
+            <a:ext cx="7269479" cy="1028700"/>
           </a:xfrm>
           <a:prstGeom prst="rect">
             <a:avLst/>
@@ -7390,7 +7391,7 @@
           <a:lstStyle/>
           <a:p>
             <a:r>
-              <a:rPr sz="1400" b="1" i="0">
+              <a:rPr sz="1725" b="1" i="0">
                 <a:solidFill>
                   <a:srgbClr val="16130A"/>
                 </a:solidFill>
@@ -7399,7 +7400,7 @@
               <a:t>Why gate at all? </a:t>
             </a:r>
             <a:r>
-              <a:rPr sz="1400" b="0" i="0">
+              <a:rPr sz="1650" b="0" i="0">
                 <a:solidFill>
                   <a:srgbClr val="3A3628"/>
                 </a:solidFill>
@@ -7418,8 +7419,8 @@
         </p:nvSpPr>
         <p:spPr>
           <a:xfrm>
-            <a:off x="502920" y="2697480"/>
-            <a:ext cx="2066543" cy="1874519"/>
+            <a:off x="754380" y="4046220"/>
+            <a:ext cx="3099815" cy="2811779"/>
           </a:xfrm>
           <a:prstGeom prst="roundRect">
             <a:avLst>
@@ -7466,8 +7467,8 @@
         </p:nvSpPr>
         <p:spPr>
           <a:xfrm>
-            <a:off x="640080" y="2770632"/>
-            <a:ext cx="1837943" cy="1737360"/>
+            <a:off x="960120" y="4155948"/>
+            <a:ext cx="2756915" cy="2606039"/>
           </a:xfrm>
           <a:prstGeom prst="rect">
             <a:avLst/>
@@ -7481,7 +7482,7 @@
           <a:lstStyle/>
           <a:p>
             <a:r>
-              <a:rPr sz="1400" b="1" i="0">
+              <a:rPr sz="1800" b="1" i="0">
                 <a:solidFill>
                   <a:srgbClr val="7A6100"/>
                 </a:solidFill>
@@ -7490,7 +7491,7 @@
               <a:t>1  </a:t>
             </a:r>
             <a:r>
-              <a:rPr sz="1400" b="1" i="0">
+              <a:rPr sz="1875" b="1" i="0">
                 <a:solidFill>
                   <a:srgbClr val="16130A"/>
                 </a:solidFill>
@@ -7506,7 +7507,7 @@
               </a:spcBef>
             </a:pPr>
             <a:r>
-              <a:rPr sz="1400" b="1" i="0">
+              <a:rPr sz="1500" b="1" i="0">
                 <a:solidFill>
                   <a:srgbClr val="7A6100"/>
                 </a:solidFill>
@@ -7522,7 +7523,7 @@
               </a:spcBef>
             </a:pPr>
             <a:r>
-              <a:rPr sz="1400" b="0" i="0">
+              <a:rPr sz="1425" b="0" i="0">
                 <a:solidFill>
                   <a:srgbClr val="3A3628"/>
                 </a:solidFill>
@@ -7538,7 +7539,7 @@
               </a:spcBef>
             </a:pPr>
             <a:r>
-              <a:rPr sz="1400" b="0" i="0">
+              <a:rPr sz="1425" b="0" i="0">
                 <a:solidFill>
                   <a:srgbClr val="3A3628"/>
                 </a:solidFill>
@@ -7557,8 +7558,8 @@
         </p:nvSpPr>
         <p:spPr>
           <a:xfrm>
-            <a:off x="2660904" y="2697480"/>
-            <a:ext cx="2066543" cy="1874519"/>
+            <a:off x="3991356" y="4046220"/>
+            <a:ext cx="3099815" cy="2811779"/>
           </a:xfrm>
           <a:prstGeom prst="roundRect">
             <a:avLst>
@@ -7605,8 +7606,8 @@
         </p:nvSpPr>
         <p:spPr>
           <a:xfrm>
-            <a:off x="2798064" y="2770632"/>
-            <a:ext cx="1837943" cy="1737360"/>
+            <a:off x="4197096" y="4155948"/>
+            <a:ext cx="2756915" cy="2606039"/>
           </a:xfrm>
           <a:prstGeom prst="rect">
             <a:avLst/>
@@ -7620,7 +7621,7 @@
           <a:lstStyle/>
           <a:p>
             <a:r>
-              <a:rPr sz="1400" b="1" i="0">
+              <a:rPr sz="1800" b="1" i="0">
                 <a:solidFill>
                   <a:srgbClr val="7A6100"/>
                 </a:solidFill>
@@ -7629,7 +7630,7 @@
               <a:t>2  </a:t>
             </a:r>
             <a:r>
-              <a:rPr sz="1400" b="1" i="0">
+              <a:rPr sz="1875" b="1" i="0">
                 <a:solidFill>
                   <a:srgbClr val="16130A"/>
                 </a:solidFill>
@@ -7645,7 +7646,7 @@
               </a:spcBef>
             </a:pPr>
             <a:r>
-              <a:rPr sz="1400" b="1" i="0">
+              <a:rPr sz="1500" b="1" i="0">
                 <a:solidFill>
                   <a:srgbClr val="7A6100"/>
                 </a:solidFill>
@@ -7661,7 +7662,7 @@
               </a:spcBef>
             </a:pPr>
             <a:r>
-              <a:rPr sz="1400" b="0" i="0">
+              <a:rPr sz="1425" b="0" i="0">
                 <a:solidFill>
                   <a:srgbClr val="3A3628"/>
                 </a:solidFill>
@@ -7677,7 +7678,7 @@
               </a:spcBef>
             </a:pPr>
             <a:r>
-              <a:rPr sz="1400" b="0" i="0">
+              <a:rPr sz="1425" b="0" i="0">
                 <a:solidFill>
                   <a:srgbClr val="3A3628"/>
                 </a:solidFill>
@@ -7693,7 +7694,7 @@
               </a:spcBef>
             </a:pPr>
             <a:r>
-              <a:rPr sz="1400" b="0" i="0">
+              <a:rPr sz="1425" b="0" i="0">
                 <a:solidFill>
                   <a:srgbClr val="3A3628"/>
                 </a:solidFill>
@@ -7712,8 +7713,8 @@
         </p:nvSpPr>
         <p:spPr>
           <a:xfrm>
-            <a:off x="4818888" y="2697480"/>
-            <a:ext cx="2066543" cy="1874519"/>
+            <a:off x="7228331" y="4046220"/>
+            <a:ext cx="3099815" cy="2811779"/>
           </a:xfrm>
           <a:prstGeom prst="roundRect">
             <a:avLst>
@@ -7758,8 +7759,8 @@
         </p:nvSpPr>
         <p:spPr>
           <a:xfrm>
-            <a:off x="4956048" y="2770632"/>
-            <a:ext cx="1837943" cy="1737360"/>
+            <a:off x="7434071" y="4155948"/>
+            <a:ext cx="2756915" cy="2606039"/>
           </a:xfrm>
           <a:prstGeom prst="rect">
             <a:avLst/>
@@ -7773,7 +7774,7 @@
           <a:lstStyle/>
           <a:p>
             <a:r>
-              <a:rPr sz="1400" b="1" i="0">
+              <a:rPr sz="1800" b="1" i="0">
                 <a:solidFill>
                   <a:srgbClr val="F8CD1B"/>
                 </a:solidFill>
@@ -7782,7 +7783,7 @@
               <a:t>3  </a:t>
             </a:r>
             <a:r>
-              <a:rPr sz="1400" b="1" i="0">
+              <a:rPr sz="1875" b="1" i="0">
                 <a:solidFill>
                   <a:srgbClr val="FFFFFF"/>
                 </a:solidFill>
@@ -7798,7 +7799,7 @@
               </a:spcBef>
             </a:pPr>
             <a:r>
-              <a:rPr sz="1400" b="1" i="0">
+              <a:rPr sz="1500" b="1" i="0">
                 <a:solidFill>
                   <a:srgbClr val="F8CD1B"/>
                 </a:solidFill>
@@ -7814,7 +7815,7 @@
               </a:spcBef>
             </a:pPr>
             <a:r>
-              <a:rPr sz="1400" b="0" i="0">
+              <a:rPr sz="1425" b="0" i="0">
                 <a:solidFill>
                   <a:srgbClr val="DAD8CE"/>
                 </a:solidFill>
@@ -7830,7 +7831,7 @@
               </a:spcBef>
             </a:pPr>
             <a:r>
-              <a:rPr sz="1400" b="0" i="0">
+              <a:rPr sz="1425" b="0" i="0">
                 <a:solidFill>
                   <a:srgbClr val="DAD8CE"/>
                 </a:solidFill>
@@ -7846,7 +7847,7 @@
               </a:spcBef>
             </a:pPr>
             <a:r>
-              <a:rPr sz="1400" b="0" i="0">
+              <a:rPr sz="1425" b="0" i="0">
                 <a:solidFill>
                   <a:srgbClr val="DAD8CE"/>
                 </a:solidFill>
@@ -7865,8 +7866,8 @@
         </p:nvSpPr>
         <p:spPr>
           <a:xfrm>
-            <a:off x="6976871" y="2697480"/>
-            <a:ext cx="2066543" cy="1874519"/>
+            <a:off x="10465307" y="4046220"/>
+            <a:ext cx="3099815" cy="2811779"/>
           </a:xfrm>
           <a:prstGeom prst="roundRect">
             <a:avLst>
@@ -7913,8 +7914,8 @@
         </p:nvSpPr>
         <p:spPr>
           <a:xfrm>
-            <a:off x="7114031" y="2770632"/>
-            <a:ext cx="1837943" cy="1737360"/>
+            <a:off x="10671047" y="4155948"/>
+            <a:ext cx="2756915" cy="2606039"/>
           </a:xfrm>
           <a:prstGeom prst="rect">
             <a:avLst/>
@@ -7928,7 +7929,7 @@
           <a:lstStyle/>
           <a:p>
             <a:r>
-              <a:rPr sz="1400" b="1" i="0">
+              <a:rPr sz="1800" b="1" i="0">
                 <a:solidFill>
                   <a:srgbClr val="7A6100"/>
                 </a:solidFill>
@@ -7937,7 +7938,7 @@
               <a:t>4  </a:t>
             </a:r>
             <a:r>
-              <a:rPr sz="1400" b="1" i="0">
+              <a:rPr sz="1875" b="1" i="0">
                 <a:solidFill>
                   <a:srgbClr val="16130A"/>
                 </a:solidFill>
@@ -7953,7 +7954,7 @@
               </a:spcBef>
             </a:pPr>
             <a:r>
-              <a:rPr sz="1400" b="1" i="0">
+              <a:rPr sz="1500" b="1" i="0">
                 <a:solidFill>
                   <a:srgbClr val="7A6100"/>
                 </a:solidFill>
@@ -7969,7 +7970,7 @@
               </a:spcBef>
             </a:pPr>
             <a:r>
-              <a:rPr sz="1400" b="0" i="0">
+              <a:rPr sz="1425" b="0" i="0">
                 <a:solidFill>
                   <a:srgbClr val="3A3628"/>
                 </a:solidFill>
@@ -7985,7 +7986,7 @@
               </a:spcBef>
             </a:pPr>
             <a:r>
-              <a:rPr sz="1400" b="0" i="0">
+              <a:rPr sz="1425" b="0" i="0">
                 <a:solidFill>
                   <a:srgbClr val="3A3628"/>
                 </a:solidFill>
@@ -8001,7 +8002,7 @@
               </a:spcBef>
             </a:pPr>
             <a:r>
-              <a:rPr sz="1400" b="0" i="0">
+              <a:rPr sz="1425" b="0" i="0">
                 <a:solidFill>
                   <a:srgbClr val="3A3628"/>
                 </a:solidFill>
@@ -8020,8 +8021,8 @@
         </p:nvSpPr>
         <p:spPr>
           <a:xfrm>
-            <a:off x="9134855" y="2697480"/>
-            <a:ext cx="2066543" cy="1874519"/>
+            <a:off x="13702283" y="4046220"/>
+            <a:ext cx="3099815" cy="2811779"/>
           </a:xfrm>
           <a:prstGeom prst="roundRect">
             <a:avLst>
@@ -8068,8 +8069,8 @@
         </p:nvSpPr>
         <p:spPr>
           <a:xfrm>
-            <a:off x="9272015" y="2770632"/>
-            <a:ext cx="1837943" cy="1737360"/>
+            <a:off x="13908023" y="4155948"/>
+            <a:ext cx="2756915" cy="2606039"/>
           </a:xfrm>
           <a:prstGeom prst="rect">
             <a:avLst/>
@@ -8083,7 +8084,7 @@
           <a:lstStyle/>
           <a:p>
             <a:r>
-              <a:rPr sz="1400" b="1" i="0">
+              <a:rPr sz="1800" b="1" i="0">
                 <a:solidFill>
                   <a:srgbClr val="7A6100"/>
                 </a:solidFill>
@@ -8092,7 +8093,7 @@
               <a:t>5  </a:t>
             </a:r>
             <a:r>
-              <a:rPr sz="1400" b="1" i="0">
+              <a:rPr sz="1875" b="1" i="0">
                 <a:solidFill>
                   <a:srgbClr val="16130A"/>
                 </a:solidFill>
@@ -8108,7 +8109,7 @@
               </a:spcBef>
             </a:pPr>
             <a:r>
-              <a:rPr sz="1400" b="1" i="0">
+              <a:rPr sz="1500" b="1" i="0">
                 <a:solidFill>
                   <a:srgbClr val="7A6100"/>
                 </a:solidFill>
@@ -8124,7 +8125,7 @@
               </a:spcBef>
             </a:pPr>
             <a:r>
-              <a:rPr sz="1400" b="0" i="0">
+              <a:rPr sz="1425" b="0" i="0">
                 <a:solidFill>
                   <a:srgbClr val="3A3628"/>
                 </a:solidFill>
@@ -8140,7 +8141,7 @@
               </a:spcBef>
             </a:pPr>
             <a:r>
-              <a:rPr sz="1400" b="0" i="0">
+              <a:rPr sz="1425" b="0" i="0">
                 <a:solidFill>
                   <a:srgbClr val="3A3628"/>
                 </a:solidFill>
@@ -8154,64 +8155,6 @@
       <p:pic>
         <p:nvPicPr>
           <p:cNvPr id="25" name="Picture 24" descr="disc-01-extractor-pass-crop.png"/>
-          <p:cNvPicPr>
-            <a:picLocks noChangeAspect="1"/>
-          </p:cNvPicPr>
-          <p:nvPr/>
-        </p:nvPicPr>
-        <p:blipFill>
-          <a:blip r:embed="rId3"/>
-          <a:stretch>
-            <a:fillRect/>
-          </a:stretch>
-        </p:blipFill>
-        <p:spPr>
-          <a:xfrm>
-            <a:off x="1149936" y="4617720"/>
-            <a:ext cx="1997806" cy="1508760"/>
-          </a:xfrm>
-          <a:prstGeom prst="rect">
-            <a:avLst/>
-          </a:prstGeom>
-        </p:spPr>
-      </p:pic>
-      <p:sp>
-        <p:nvSpPr>
-          <p:cNvPr id="26" name="TextBox 25"/>
-          <p:cNvSpPr txBox="1"/>
-          <p:nvPr/>
-        </p:nvSpPr>
-        <p:spPr>
-          <a:xfrm>
-            <a:off x="502920" y="6172200"/>
-            <a:ext cx="3291840" cy="320040"/>
-          </a:xfrm>
-          <a:prstGeom prst="rect">
-            <a:avLst/>
-          </a:prstGeom>
-          <a:noFill/>
-        </p:spPr>
-        <p:txBody>
-          <a:bodyPr wrap="square" anchor="t">
-            <a:spAutoFit/>
-          </a:bodyPr>
-          <a:lstStyle/>
-          <a:p>
-            <a:r>
-              <a:rPr sz="1400" b="1" i="0">
-                <a:solidFill>
-                  <a:srgbClr val="146634"/>
-                </a:solidFill>
-                <a:latin typeface="Arial"/>
-              </a:rPr>
-              <a:t>✓ KEPT — CATEGORY BEHAVIOUR</a:t>
-            </a:r>
-          </a:p>
-        </p:txBody>
-      </p:sp>
-      <p:pic>
-        <p:nvPicPr>
-          <p:cNvPr id="27" name="Picture 26" descr="disc-02-extractor-reject-crop.png"/>
           <p:cNvPicPr>
             <a:picLocks noChangeAspect="1"/>
           </p:cNvPicPr>
@@ -8225,8 +8168,8 @@
         </p:blipFill>
         <p:spPr>
           <a:xfrm>
-            <a:off x="4578936" y="4617720"/>
-            <a:ext cx="1997806" cy="1508760"/>
+            <a:off x="1724905" y="6926579"/>
+            <a:ext cx="2996709" cy="2263139"/>
           </a:xfrm>
           <a:prstGeom prst="rect">
             <a:avLst/>
@@ -8235,14 +8178,14 @@
       </p:pic>
       <p:sp>
         <p:nvSpPr>
-          <p:cNvPr id="28" name="TextBox 27"/>
+          <p:cNvPr id="26" name="TextBox 25"/>
           <p:cNvSpPr txBox="1"/>
           <p:nvPr/>
         </p:nvSpPr>
         <p:spPr>
           <a:xfrm>
-            <a:off x="3931920" y="6172200"/>
-            <a:ext cx="3291840" cy="320040"/>
+            <a:off x="754380" y="9258300"/>
+            <a:ext cx="4937760" cy="480059"/>
           </a:xfrm>
           <a:prstGeom prst="rect">
             <a:avLst/>
@@ -8256,7 +8199,65 @@
           <a:lstStyle/>
           <a:p>
             <a:r>
-              <a:rPr sz="1400" b="1" i="0">
+              <a:rPr sz="1425" b="1" i="0">
+                <a:solidFill>
+                  <a:srgbClr val="146634"/>
+                </a:solidFill>
+                <a:latin typeface="Arial"/>
+              </a:rPr>
+              <a:t>✓ KEPT — CATEGORY BEHAVIOUR</a:t>
+            </a:r>
+          </a:p>
+        </p:txBody>
+      </p:sp>
+      <p:pic>
+        <p:nvPicPr>
+          <p:cNvPr id="27" name="Picture 26" descr="disc-02-extractor-reject-crop.png"/>
+          <p:cNvPicPr>
+            <a:picLocks noChangeAspect="1"/>
+          </p:cNvPicPr>
+          <p:nvPr/>
+        </p:nvPicPr>
+        <p:blipFill>
+          <a:blip r:embed="rId5"/>
+          <a:stretch>
+            <a:fillRect/>
+          </a:stretch>
+        </p:blipFill>
+        <p:spPr>
+          <a:xfrm>
+            <a:off x="6868405" y="6926579"/>
+            <a:ext cx="2996709" cy="2263139"/>
+          </a:xfrm>
+          <a:prstGeom prst="rect">
+            <a:avLst/>
+          </a:prstGeom>
+        </p:spPr>
+      </p:pic>
+      <p:sp>
+        <p:nvSpPr>
+          <p:cNvPr id="28" name="TextBox 27"/>
+          <p:cNvSpPr txBox="1"/>
+          <p:nvPr/>
+        </p:nvSpPr>
+        <p:spPr>
+          <a:xfrm>
+            <a:off x="5897879" y="9258300"/>
+            <a:ext cx="4937760" cy="480059"/>
+          </a:xfrm>
+          <a:prstGeom prst="rect">
+            <a:avLst/>
+          </a:prstGeom>
+          <a:noFill/>
+        </p:spPr>
+        <p:txBody>
+          <a:bodyPr wrap="square" anchor="t">
+            <a:spAutoFit/>
+          </a:bodyPr>
+          <a:lstStyle/>
+          <a:p>
+            <a:r>
+              <a:rPr sz="1425" b="1" i="0">
                 <a:solidFill>
                   <a:srgbClr val="7A6100"/>
                 </a:solidFill>
@@ -8275,8 +8276,8 @@
         </p:nvSpPr>
         <p:spPr>
           <a:xfrm>
-            <a:off x="7452360" y="4617720"/>
-            <a:ext cx="4251960" cy="868680"/>
+            <a:off x="11178540" y="6926579"/>
+            <a:ext cx="6377940" cy="1303019"/>
           </a:xfrm>
           <a:prstGeom prst="roundRect">
             <a:avLst>
@@ -8323,8 +8324,8 @@
         </p:nvSpPr>
         <p:spPr>
           <a:xfrm>
-            <a:off x="7589520" y="4663440"/>
-            <a:ext cx="3977639" cy="777240"/>
+            <a:off x="11384280" y="6995159"/>
+            <a:ext cx="5966459" cy="1165860"/>
           </a:xfrm>
           <a:prstGeom prst="rect">
             <a:avLst/>
@@ -8338,7 +8339,7 @@
           <a:lstStyle/>
           <a:p>
             <a:r>
-              <a:rPr sz="1400" b="1" i="0">
+              <a:rPr sz="1575" b="1" i="0">
                 <a:solidFill>
                   <a:srgbClr val="7A6100"/>
                 </a:solidFill>
@@ -8347,7 +8348,7 @@
               <a:t>Design decision · the gate. </a:t>
             </a:r>
             <a:r>
-              <a:rPr sz="1400" b="1" i="0">
+              <a:rPr sz="1575" b="1" i="0">
                 <a:solidFill>
                   <a:srgbClr val="16130A"/>
                 </a:solidFill>
@@ -8366,8 +8367,8 @@
         </p:nvSpPr>
         <p:spPr>
           <a:xfrm>
-            <a:off x="7452360" y="5577840"/>
-            <a:ext cx="4251960" cy="868680"/>
+            <a:off x="11178540" y="8366759"/>
+            <a:ext cx="6377940" cy="1303019"/>
           </a:xfrm>
           <a:prstGeom prst="roundRect">
             <a:avLst>
@@ -8414,8 +8415,8 @@
         </p:nvSpPr>
         <p:spPr>
           <a:xfrm>
-            <a:off x="7589520" y="5623560"/>
-            <a:ext cx="3977639" cy="777240"/>
+            <a:off x="11384280" y="8435340"/>
+            <a:ext cx="5966459" cy="1165860"/>
           </a:xfrm>
           <a:prstGeom prst="rect">
             <a:avLst/>
@@ -8429,7 +8430,7 @@
           <a:lstStyle/>
           <a:p>
             <a:r>
-              <a:rPr sz="1400" b="1" i="0">
+              <a:rPr sz="1575" b="1" i="0">
                 <a:solidFill>
                   <a:srgbClr val="146634"/>
                 </a:solidFill>
@@ -8438,7 +8439,7 @@
               <a:t>What the engine measures: </a:t>
             </a:r>
             <a:r>
-              <a:rPr sz="1400" b="0" i="0">
+              <a:rPr sz="1575" b="0" i="0">
                 <a:solidFill>
                   <a:srgbClr val="3A3628"/>
                 </a:solidFill>
@@ -8476,7 +8477,7 @@
         <p:spPr>
           <a:xfrm>
             <a:off x="0" y="0"/>
-            <a:ext cx="12191695" cy="6858000"/>
+            <a:ext cx="18287542" cy="10287000"/>
           </a:xfrm>
           <a:prstGeom prst="rect">
             <a:avLst/>
@@ -8527,8 +8528,8 @@
         </p:blipFill>
         <p:spPr>
           <a:xfrm>
-            <a:off x="502920" y="320040"/>
-            <a:ext cx="975836" cy="274320"/>
+            <a:off x="754380" y="480059"/>
+            <a:ext cx="1463751" cy="411479"/>
           </a:xfrm>
           <a:prstGeom prst="rect">
             <a:avLst/>
@@ -8543,8 +8544,8 @@
         </p:nvSpPr>
         <p:spPr>
           <a:xfrm>
-            <a:off x="1280160" y="292607"/>
-            <a:ext cx="9601200" cy="365760"/>
+            <a:off x="1920239" y="438911"/>
+            <a:ext cx="14401800" cy="548640"/>
           </a:xfrm>
           <a:prstGeom prst="rect">
             <a:avLst/>
@@ -8558,7 +8559,7 @@
           <a:lstStyle/>
           <a:p>
             <a:r>
-              <a:rPr sz="1400" b="1" i="0">
+              <a:rPr sz="1950" b="1" i="0">
                 <a:solidFill>
                   <a:srgbClr val="7A6100"/>
                 </a:solidFill>
@@ -8577,8 +8578,8 @@
         </p:nvSpPr>
         <p:spPr>
           <a:xfrm>
-            <a:off x="502920" y="713232"/>
-            <a:ext cx="11155680" cy="1234440"/>
+            <a:off x="754380" y="1069848"/>
+            <a:ext cx="16733519" cy="1851660"/>
           </a:xfrm>
           <a:prstGeom prst="rect">
             <a:avLst/>
@@ -8592,7 +8593,7 @@
           <a:lstStyle/>
           <a:p>
             <a:r>
-              <a:rPr sz="2100" b="1" i="0">
+              <a:rPr sz="3150" b="1" i="0">
                 <a:solidFill>
                   <a:srgbClr val="16130A"/>
                 </a:solidFill>
@@ -8611,8 +8612,8 @@
         </p:nvSpPr>
         <p:spPr>
           <a:xfrm>
-            <a:off x="502920" y="1691640"/>
-            <a:ext cx="3657600" cy="1965960"/>
+            <a:off x="754380" y="2537460"/>
+            <a:ext cx="5486400" cy="2948939"/>
           </a:xfrm>
           <a:prstGeom prst="roundRect">
             <a:avLst>
@@ -8659,8 +8660,8 @@
         </p:nvSpPr>
         <p:spPr>
           <a:xfrm>
-            <a:off x="685800" y="1810512"/>
-            <a:ext cx="3291840" cy="1783080"/>
+            <a:off x="1028700" y="2715768"/>
+            <a:ext cx="4937760" cy="2674620"/>
           </a:xfrm>
           <a:prstGeom prst="rect">
             <a:avLst/>
@@ -8674,7 +8675,7 @@
           <a:lstStyle/>
           <a:p>
             <a:r>
-              <a:rPr sz="1400" b="1" i="0">
+              <a:rPr sz="1800" b="1" i="0">
                 <a:solidFill>
                   <a:srgbClr val="7A6100"/>
                 </a:solidFill>
@@ -8683,7 +8684,7 @@
               <a:t>1  </a:t>
             </a:r>
             <a:r>
-              <a:rPr sz="1400" b="1" i="0">
+              <a:rPr sz="1950" b="1" i="0">
                 <a:solidFill>
                   <a:srgbClr val="16130A"/>
                 </a:solidFill>
@@ -8699,7 +8700,7 @@
               </a:spcBef>
             </a:pPr>
             <a:r>
-              <a:rPr sz="1400" b="0" i="0">
+              <a:rPr sz="1575" b="0" i="0">
                 <a:solidFill>
                   <a:srgbClr val="3A3628"/>
                 </a:solidFill>
@@ -8715,7 +8716,7 @@
               </a:spcBef>
             </a:pPr>
             <a:r>
-              <a:rPr sz="2000" b="1" i="0">
+              <a:rPr sz="3000" b="1" i="0">
                 <a:solidFill>
                   <a:srgbClr val="318616"/>
                 </a:solidFill>
@@ -8724,7 +8725,7 @@
               <a:t>70%  </a:t>
             </a:r>
             <a:r>
-              <a:rPr sz="1400" b="1" i="0">
+              <a:rPr sz="1425" b="1" i="0">
                 <a:solidFill>
                   <a:srgbClr val="5A5545"/>
                 </a:solidFill>
@@ -8743,8 +8744,8 @@
         </p:nvSpPr>
         <p:spPr>
           <a:xfrm>
-            <a:off x="4297680" y="1691640"/>
-            <a:ext cx="3657600" cy="1965960"/>
+            <a:off x="6446520" y="2537460"/>
+            <a:ext cx="5486400" cy="2948939"/>
           </a:xfrm>
           <a:prstGeom prst="roundRect">
             <a:avLst>
@@ -8791,8 +8792,8 @@
         </p:nvSpPr>
         <p:spPr>
           <a:xfrm>
-            <a:off x="4480560" y="1810512"/>
-            <a:ext cx="3291840" cy="1783080"/>
+            <a:off x="6720840" y="2715768"/>
+            <a:ext cx="4937760" cy="2674620"/>
           </a:xfrm>
           <a:prstGeom prst="rect">
             <a:avLst/>
@@ -8806,7 +8807,7 @@
           <a:lstStyle/>
           <a:p>
             <a:r>
-              <a:rPr sz="1400" b="1" i="0">
+              <a:rPr sz="1800" b="1" i="0">
                 <a:solidFill>
                   <a:srgbClr val="7A6100"/>
                 </a:solidFill>
@@ -8815,7 +8816,7 @@
               <a:t>2  </a:t>
             </a:r>
             <a:r>
-              <a:rPr sz="1400" b="1" i="0">
+              <a:rPr sz="1950" b="1" i="0">
                 <a:solidFill>
                   <a:srgbClr val="16130A"/>
                 </a:solidFill>
@@ -8831,7 +8832,7 @@
               </a:spcBef>
             </a:pPr>
             <a:r>
-              <a:rPr sz="1400" b="0" i="0">
+              <a:rPr sz="1575" b="0" i="0">
                 <a:solidFill>
                   <a:srgbClr val="3A3628"/>
                 </a:solidFill>
@@ -8847,7 +8848,7 @@
               </a:spcBef>
             </a:pPr>
             <a:r>
-              <a:rPr sz="2000" b="1" i="0">
+              <a:rPr sz="3000" b="1" i="0">
                 <a:solidFill>
                   <a:srgbClr val="318616"/>
                 </a:solidFill>
@@ -8856,7 +8857,7 @@
               <a:t>15,820 → 4,740 → 1,094  </a:t>
             </a:r>
             <a:r>
-              <a:rPr sz="1400" b="1" i="0">
+              <a:rPr sz="1425" b="1" i="0">
                 <a:solidFill>
                   <a:srgbClr val="5A5545"/>
                 </a:solidFill>
@@ -8875,8 +8876,8 @@
         </p:nvSpPr>
         <p:spPr>
           <a:xfrm>
-            <a:off x="8092440" y="1691640"/>
-            <a:ext cx="3611880" cy="1828800"/>
+            <a:off x="12138659" y="2537460"/>
+            <a:ext cx="5417820" cy="2743200"/>
           </a:xfrm>
           <a:prstGeom prst="roundRect">
             <a:avLst>
@@ -8923,8 +8924,8 @@
         </p:nvSpPr>
         <p:spPr>
           <a:xfrm>
-            <a:off x="8275320" y="1810512"/>
-            <a:ext cx="3291840" cy="1691640"/>
+            <a:off x="12412980" y="2715768"/>
+            <a:ext cx="4937760" cy="2537460"/>
           </a:xfrm>
           <a:prstGeom prst="rect">
             <a:avLst/>
@@ -8938,7 +8939,7 @@
           <a:lstStyle/>
           <a:p>
             <a:r>
-              <a:rPr sz="1400" b="1" i="0">
+              <a:rPr sz="1800" b="1" i="0">
                 <a:solidFill>
                   <a:srgbClr val="7A6100"/>
                 </a:solidFill>
@@ -8947,7 +8948,7 @@
               <a:t>3  </a:t>
             </a:r>
             <a:r>
-              <a:rPr sz="1400" b="1" i="0">
+              <a:rPr sz="1950" b="1" i="0">
                 <a:solidFill>
                   <a:srgbClr val="16130A"/>
                 </a:solidFill>
@@ -8963,7 +8964,7 @@
               </a:spcBef>
             </a:pPr>
             <a:r>
-              <a:rPr sz="1400" b="0" i="0">
+              <a:rPr sz="1425" b="0" i="0">
                 <a:solidFill>
                   <a:srgbClr val="3A3628"/>
                 </a:solidFill>
@@ -8972,7 +8973,7 @@
               <a:t>Groceries: </a:t>
             </a:r>
             <a:r>
-              <a:rPr sz="1400" b="1" i="0">
+              <a:rPr sz="1425" b="1" i="0">
                 <a:solidFill>
                   <a:srgbClr val="16130A"/>
                 </a:solidFill>
@@ -8988,7 +8989,7 @@
               </a:spcBef>
             </a:pPr>
             <a:r>
-              <a:rPr sz="1400" b="0" i="0">
+              <a:rPr sz="1425" b="0" i="0">
                 <a:solidFill>
                   <a:srgbClr val="3A3628"/>
                 </a:solidFill>
@@ -8997,7 +8998,7 @@
               <a:t>Electronics: </a:t>
             </a:r>
             <a:r>
-              <a:rPr sz="1400" b="1" i="0">
+              <a:rPr sz="1425" b="1" i="0">
                 <a:solidFill>
                   <a:srgbClr val="16130A"/>
                 </a:solidFill>
@@ -9013,7 +9014,7 @@
               </a:spcBef>
             </a:pPr>
             <a:r>
-              <a:rPr sz="1400" b="0" i="0">
+              <a:rPr sz="1425" b="0" i="0">
                 <a:solidFill>
                   <a:srgbClr val="3A3628"/>
                 </a:solidFill>
@@ -9022,7 +9023,7 @@
               <a:t>Snacks &amp; beverages: </a:t>
             </a:r>
             <a:r>
-              <a:rPr sz="1400" b="1" i="0">
+              <a:rPr sz="1425" b="1" i="0">
                 <a:solidFill>
                   <a:srgbClr val="16130A"/>
                 </a:solidFill>
@@ -9038,7 +9039,7 @@
               </a:spcBef>
             </a:pPr>
             <a:r>
-              <a:rPr sz="1400" b="0" i="0">
+              <a:rPr sz="1425" b="0" i="0">
                 <a:solidFill>
                   <a:srgbClr val="3A3628"/>
                 </a:solidFill>
@@ -9047,7 +9048,7 @@
               <a:t>Household essentials: </a:t>
             </a:r>
             <a:r>
-              <a:rPr sz="1400" b="1" i="0">
+              <a:rPr sz="1425" b="1" i="0">
                 <a:solidFill>
                   <a:srgbClr val="16130A"/>
                 </a:solidFill>
@@ -9063,7 +9064,7 @@
               </a:spcBef>
             </a:pPr>
             <a:r>
-              <a:rPr sz="1400" b="0" i="0">
+              <a:rPr sz="1425" b="0" i="0">
                 <a:solidFill>
                   <a:srgbClr val="3A3628"/>
                 </a:solidFill>
@@ -9072,7 +9073,7 @@
               <a:t>Personal care: </a:t>
             </a:r>
             <a:r>
-              <a:rPr sz="1400" b="1" i="0">
+              <a:rPr sz="1425" b="1" i="0">
                 <a:solidFill>
                   <a:srgbClr val="16130A"/>
                 </a:solidFill>
@@ -9091,8 +9092,8 @@
         </p:nvSpPr>
         <p:spPr>
           <a:xfrm>
-            <a:off x="502920" y="3657600"/>
-            <a:ext cx="3657600" cy="1417320"/>
+            <a:off x="754380" y="5486400"/>
+            <a:ext cx="5486400" cy="2125980"/>
           </a:xfrm>
           <a:prstGeom prst="roundRect">
             <a:avLst>
@@ -9139,8 +9140,8 @@
         </p:nvSpPr>
         <p:spPr>
           <a:xfrm>
-            <a:off x="685800" y="3767328"/>
-            <a:ext cx="3291840" cy="1234440"/>
+            <a:off x="1028700" y="5650992"/>
+            <a:ext cx="4937760" cy="1851660"/>
           </a:xfrm>
           <a:prstGeom prst="rect">
             <a:avLst/>
@@ -9154,7 +9155,7 @@
           <a:lstStyle/>
           <a:p>
             <a:r>
-              <a:rPr sz="1400" b="1" i="0">
+              <a:rPr sz="1800" b="1" i="0">
                 <a:solidFill>
                   <a:srgbClr val="146634"/>
                 </a:solidFill>
@@ -9163,7 +9164,7 @@
               <a:t>4  </a:t>
             </a:r>
             <a:r>
-              <a:rPr sz="1400" b="1" i="0">
+              <a:rPr sz="1950" b="1" i="0">
                 <a:solidFill>
                   <a:srgbClr val="16130A"/>
                 </a:solidFill>
@@ -9179,7 +9180,7 @@
               </a:spcBef>
             </a:pPr>
             <a:r>
-              <a:rPr sz="1400" b="0" i="0">
+              <a:rPr sz="1575" b="0" i="0">
                 <a:solidFill>
                   <a:srgbClr val="3A3628"/>
                 </a:solidFill>
@@ -9206,8 +9207,8 @@
         </p:blipFill>
         <p:spPr>
           <a:xfrm>
-            <a:off x="8709990" y="3703320"/>
-            <a:ext cx="2376779" cy="2514600"/>
+            <a:off x="13064985" y="5554979"/>
+            <a:ext cx="3565169" cy="3771900"/>
           </a:xfrm>
           <a:prstGeom prst="rect">
             <a:avLst/>
@@ -9222,8 +9223,8 @@
         </p:nvSpPr>
         <p:spPr>
           <a:xfrm>
-            <a:off x="8092440" y="6263640"/>
-            <a:ext cx="3611880" cy="457200"/>
+            <a:off x="12138659" y="9395459"/>
+            <a:ext cx="5417820" cy="685800"/>
           </a:xfrm>
           <a:prstGeom prst="rect">
             <a:avLst/>
@@ -9256,8 +9257,8 @@
         </p:nvSpPr>
         <p:spPr>
           <a:xfrm>
-            <a:off x="502920" y="5257800"/>
-            <a:ext cx="7223760" cy="1051560"/>
+            <a:off x="754380" y="7886700"/>
+            <a:ext cx="10835640" cy="1577339"/>
           </a:xfrm>
           <a:prstGeom prst="roundRect">
             <a:avLst>
@@ -9302,8 +9303,8 @@
         </p:nvSpPr>
         <p:spPr>
           <a:xfrm>
-            <a:off x="731520" y="5394960"/>
-            <a:ext cx="6766560" cy="822960"/>
+            <a:off x="1097280" y="8092440"/>
+            <a:ext cx="10149840" cy="1234440"/>
           </a:xfrm>
           <a:prstGeom prst="rect">
             <a:avLst/>
@@ -9317,7 +9318,7 @@
           <a:lstStyle/>
           <a:p>
             <a:r>
-              <a:rPr sz="1400" b="1" i="0">
+              <a:rPr sz="1650" b="1" i="0">
                 <a:solidFill>
                   <a:srgbClr val="F8CD1B"/>
                 </a:solidFill>
@@ -9326,7 +9327,7 @@
               <a:t>THE CORE PROBLEM   </a:t>
             </a:r>
             <a:r>
-              <a:rPr sz="1400" b="1" i="0">
+              <a:rPr sz="1875" b="1" i="0">
                 <a:solidFill>
                   <a:srgbClr val="FFFFFF"/>
                 </a:solidFill>
@@ -9364,7 +9365,7 @@
         <p:spPr>
           <a:xfrm>
             <a:off x="0" y="0"/>
-            <a:ext cx="12191695" cy="6858000"/>
+            <a:ext cx="18287542" cy="10287000"/>
           </a:xfrm>
           <a:prstGeom prst="rect">
             <a:avLst/>
@@ -9415,8 +9416,8 @@
         </p:blipFill>
         <p:spPr>
           <a:xfrm>
-            <a:off x="502920" y="320040"/>
-            <a:ext cx="975836" cy="274320"/>
+            <a:off x="754380" y="480059"/>
+            <a:ext cx="1463751" cy="411479"/>
           </a:xfrm>
           <a:prstGeom prst="rect">
             <a:avLst/>
@@ -9431,8 +9432,8 @@
         </p:nvSpPr>
         <p:spPr>
           <a:xfrm>
-            <a:off x="1280160" y="292607"/>
-            <a:ext cx="9601200" cy="365760"/>
+            <a:off x="1920239" y="438911"/>
+            <a:ext cx="14401800" cy="548640"/>
           </a:xfrm>
           <a:prstGeom prst="rect">
             <a:avLst/>
@@ -9446,7 +9447,7 @@
           <a:lstStyle/>
           <a:p>
             <a:r>
-              <a:rPr sz="1400" b="1" i="0">
+              <a:rPr sz="1950" b="1" i="0">
                 <a:solidFill>
                   <a:srgbClr val="7A6100"/>
                 </a:solidFill>
@@ -9465,8 +9466,8 @@
         </p:nvSpPr>
         <p:spPr>
           <a:xfrm>
-            <a:off x="502920" y="713232"/>
-            <a:ext cx="7863840" cy="1234440"/>
+            <a:off x="754380" y="1069848"/>
+            <a:ext cx="11795759" cy="1851660"/>
           </a:xfrm>
           <a:prstGeom prst="rect">
             <a:avLst/>
@@ -9480,7 +9481,7 @@
           <a:lstStyle/>
           <a:p>
             <a:r>
-              <a:rPr sz="2200" b="1" i="0">
+              <a:rPr sz="3300" b="1" i="0">
                 <a:solidFill>
                   <a:srgbClr val="16130A"/>
                 </a:solidFill>
@@ -9499,8 +9500,8 @@
         </p:nvSpPr>
         <p:spPr>
           <a:xfrm>
-            <a:off x="8503920" y="502920"/>
-            <a:ext cx="3200400" cy="1280160"/>
+            <a:off x="12755880" y="754380"/>
+            <a:ext cx="4800600" cy="1920239"/>
           </a:xfrm>
           <a:prstGeom prst="roundRect">
             <a:avLst>
@@ -9547,8 +9548,8 @@
         </p:nvSpPr>
         <p:spPr>
           <a:xfrm>
-            <a:off x="8641080" y="566928"/>
-            <a:ext cx="2926080" cy="1143000"/>
+            <a:off x="12961619" y="850392"/>
+            <a:ext cx="4389120" cy="1714500"/>
           </a:xfrm>
           <a:prstGeom prst="rect">
             <a:avLst/>
@@ -9562,7 +9563,7 @@
           <a:lstStyle/>
           <a:p>
             <a:r>
-              <a:rPr sz="1400" b="1" i="0">
+              <a:rPr sz="1425" b="1" i="0">
                 <a:solidFill>
                   <a:srgbClr val="7A6100"/>
                 </a:solidFill>
@@ -9578,7 +9579,7 @@
               </a:spcBef>
             </a:pPr>
             <a:r>
-              <a:rPr sz="1400" b="1" i="0">
+              <a:rPr sz="1425" b="1" i="0">
                 <a:solidFill>
                   <a:srgbClr val="16130A"/>
                 </a:solidFill>
@@ -9597,8 +9598,8 @@
         </p:nvSpPr>
         <p:spPr>
           <a:xfrm>
-            <a:off x="502920" y="1874519"/>
-            <a:ext cx="3611880" cy="4343400"/>
+            <a:off x="754380" y="2811779"/>
+            <a:ext cx="5417820" cy="6515100"/>
           </a:xfrm>
           <a:prstGeom prst="roundRect">
             <a:avLst>
@@ -9645,8 +9646,8 @@
         </p:nvSpPr>
         <p:spPr>
           <a:xfrm>
-            <a:off x="685800" y="1993392"/>
-            <a:ext cx="3291840" cy="4114800"/>
+            <a:off x="1028700" y="2990088"/>
+            <a:ext cx="4937760" cy="6172200"/>
           </a:xfrm>
           <a:prstGeom prst="rect">
             <a:avLst/>
@@ -9660,7 +9661,7 @@
           <a:lstStyle/>
           <a:p>
             <a:r>
-              <a:rPr sz="1400" b="1" i="0">
+              <a:rPr sz="1800" b="1" i="0">
                 <a:solidFill>
                   <a:srgbClr val="7A6100"/>
                 </a:solidFill>
@@ -9669,7 +9670,7 @@
               <a:t>%  </a:t>
             </a:r>
             <a:r>
-              <a:rPr sz="1400" b="1" i="0">
+              <a:rPr sz="2025" b="1" i="0">
                 <a:solidFill>
                   <a:srgbClr val="16130A"/>
                 </a:solidFill>
@@ -9685,7 +9686,7 @@
               </a:spcBef>
             </a:pPr>
             <a:r>
-              <a:rPr sz="1800" b="1" i="0">
+              <a:rPr sz="2700" b="1" i="0">
                 <a:solidFill>
                   <a:srgbClr val="318616"/>
                 </a:solidFill>
@@ -9694,7 +9695,7 @@
               <a:t>58%  </a:t>
             </a:r>
             <a:r>
-              <a:rPr sz="1400" b="1" i="0">
+              <a:rPr sz="1650" b="1" i="0">
                 <a:solidFill>
                   <a:srgbClr val="16130A"/>
                 </a:solidFill>
@@ -9710,7 +9711,7 @@
               </a:spcBef>
             </a:pPr>
             <a:r>
-              <a:rPr sz="1400" b="0" i="0">
+              <a:rPr sz="1425" b="0" i="0">
                 <a:solidFill>
                   <a:srgbClr val="5A5545"/>
                 </a:solidFill>
@@ -9726,7 +9727,7 @@
               </a:spcBef>
             </a:pPr>
             <a:r>
-              <a:rPr sz="1800" b="1" i="0">
+              <a:rPr sz="2700" b="1" i="0">
                 <a:solidFill>
                   <a:srgbClr val="318616"/>
                 </a:solidFill>
@@ -9735,7 +9736,7 @@
               <a:t>48%  </a:t>
             </a:r>
             <a:r>
-              <a:rPr sz="1400" b="1" i="0">
+              <a:rPr sz="1650" b="1" i="0">
                 <a:solidFill>
                   <a:srgbClr val="16130A"/>
                 </a:solidFill>
@@ -9751,7 +9752,7 @@
               </a:spcBef>
             </a:pPr>
             <a:r>
-              <a:rPr sz="1400" b="0" i="0">
+              <a:rPr sz="1425" b="0" i="0">
                 <a:solidFill>
                   <a:srgbClr val="5A5545"/>
                 </a:solidFill>
@@ -9767,7 +9768,7 @@
               </a:spcBef>
             </a:pPr>
             <a:r>
-              <a:rPr sz="1800" b="1" i="0">
+              <a:rPr sz="2700" b="1" i="0">
                 <a:solidFill>
                   <a:srgbClr val="318616"/>
                 </a:solidFill>
@@ -9776,7 +9777,7 @@
               <a:t>73%  </a:t>
             </a:r>
             <a:r>
-              <a:rPr sz="1400" b="1" i="0">
+              <a:rPr sz="1650" b="1" i="0">
                 <a:solidFill>
                   <a:srgbClr val="16130A"/>
                 </a:solidFill>
@@ -9792,7 +9793,7 @@
               </a:spcBef>
             </a:pPr>
             <a:r>
-              <a:rPr sz="1400" b="0" i="0">
+              <a:rPr sz="1425" b="0" i="0">
                 <a:solidFill>
                   <a:srgbClr val="5A5545"/>
                 </a:solidFill>
@@ -9808,7 +9809,7 @@
               </a:spcBef>
             </a:pPr>
             <a:r>
-              <a:rPr sz="1400" b="1" i="0">
+              <a:rPr sz="1575" b="1" i="0">
                 <a:solidFill>
                   <a:srgbClr val="7A6100"/>
                 </a:solidFill>
@@ -9824,7 +9825,7 @@
               </a:spcBef>
             </a:pPr>
             <a:r>
-              <a:rPr sz="1400" b="1" i="0">
+              <a:rPr sz="1575" b="1" i="0">
                 <a:solidFill>
                   <a:srgbClr val="16130A"/>
                 </a:solidFill>
@@ -9840,7 +9841,7 @@
               </a:spcBef>
             </a:pPr>
             <a:r>
-              <a:rPr sz="1400" b="0" i="0">
+              <a:rPr sz="1425" b="0" i="0">
                 <a:solidFill>
                   <a:srgbClr val="5A5545"/>
                 </a:solidFill>
@@ -9859,8 +9860,8 @@
         </p:nvSpPr>
         <p:spPr>
           <a:xfrm>
-            <a:off x="4251960" y="1874519"/>
-            <a:ext cx="3657600" cy="4343400"/>
+            <a:off x="6377940" y="2811779"/>
+            <a:ext cx="5486400" cy="6515100"/>
           </a:xfrm>
           <a:prstGeom prst="roundRect">
             <a:avLst>
@@ -9905,8 +9906,8 @@
         </p:nvSpPr>
         <p:spPr>
           <a:xfrm>
-            <a:off x="4434840" y="1993392"/>
-            <a:ext cx="3337560" cy="4114800"/>
+            <a:off x="6652259" y="2990088"/>
+            <a:ext cx="5006340" cy="6172200"/>
           </a:xfrm>
           <a:prstGeom prst="rect">
             <a:avLst/>
@@ -9920,7 +9921,7 @@
           <a:lstStyle/>
           <a:p>
             <a:r>
-              <a:rPr sz="1400" b="1" i="0">
+              <a:rPr sz="1800" b="1" i="0">
                 <a:solidFill>
                   <a:srgbClr val="F8CD1B"/>
                 </a:solidFill>
@@ -9929,7 +9930,7 @@
               <a:t>!  </a:t>
             </a:r>
             <a:r>
-              <a:rPr sz="1400" b="1" i="0">
+              <a:rPr sz="2025" b="1" i="0">
                 <a:solidFill>
                   <a:srgbClr val="F8CD1B"/>
                 </a:solidFill>
@@ -9945,7 +9946,7 @@
               </a:spcBef>
             </a:pPr>
             <a:r>
-              <a:rPr sz="1400" b="1" i="0">
+              <a:rPr sz="1650" b="1" i="0">
                 <a:solidFill>
                   <a:srgbClr val="FFFFFF"/>
                 </a:solidFill>
@@ -9961,7 +9962,7 @@
               </a:spcBef>
             </a:pPr>
             <a:r>
-              <a:rPr sz="1400" b="0" i="0">
+              <a:rPr sz="1500" b="0" i="0">
                 <a:solidFill>
                   <a:srgbClr val="DAD8CE"/>
                 </a:solidFill>
@@ -9977,7 +9978,7 @@
               </a:spcBef>
             </a:pPr>
             <a:r>
-              <a:rPr sz="1400" b="1" i="0">
+              <a:rPr sz="1650" b="1" i="0">
                 <a:solidFill>
                   <a:srgbClr val="FFFFFF"/>
                 </a:solidFill>
@@ -9993,7 +9994,7 @@
               </a:spcBef>
             </a:pPr>
             <a:r>
-              <a:rPr sz="1400" b="0" i="0">
+              <a:rPr sz="1500" b="0" i="0">
                 <a:solidFill>
                   <a:srgbClr val="DAD8CE"/>
                 </a:solidFill>
@@ -10009,7 +10010,7 @@
               </a:spcBef>
             </a:pPr>
             <a:r>
-              <a:rPr sz="1400" b="1" i="0">
+              <a:rPr sz="1650" b="1" i="0">
                 <a:solidFill>
                   <a:srgbClr val="FFFFFF"/>
                 </a:solidFill>
@@ -10025,7 +10026,7 @@
               </a:spcBef>
             </a:pPr>
             <a:r>
-              <a:rPr sz="1400" b="0" i="0">
+              <a:rPr sz="1500" b="0" i="0">
                 <a:solidFill>
                   <a:srgbClr val="DAD8CE"/>
                 </a:solidFill>
@@ -10041,7 +10042,7 @@
               </a:spcBef>
             </a:pPr>
             <a:r>
-              <a:rPr sz="1400" b="1" i="0">
+              <a:rPr sz="1650" b="1" i="0">
                 <a:solidFill>
                   <a:srgbClr val="FFFFFF"/>
                 </a:solidFill>
@@ -10057,7 +10058,7 @@
               </a:spcBef>
             </a:pPr>
             <a:r>
-              <a:rPr sz="1400" b="0" i="0">
+              <a:rPr sz="1500" b="0" i="0">
                 <a:solidFill>
                   <a:srgbClr val="DAD8CE"/>
                 </a:solidFill>
@@ -10073,7 +10074,7 @@
               </a:spcBef>
             </a:pPr>
             <a:r>
-              <a:rPr sz="1400" b="0" i="0">
+              <a:rPr sz="1500" b="0" i="0">
                 <a:solidFill>
                   <a:srgbClr val="C9C7BC"/>
                 </a:solidFill>
@@ -10092,8 +10093,8 @@
         </p:nvSpPr>
         <p:spPr>
           <a:xfrm>
-            <a:off x="8001000" y="1874519"/>
-            <a:ext cx="3703320" cy="4343400"/>
+            <a:off x="12001500" y="2811779"/>
+            <a:ext cx="5554979" cy="6515100"/>
           </a:xfrm>
           <a:prstGeom prst="roundRect">
             <a:avLst>
@@ -10140,8 +10141,8 @@
         </p:nvSpPr>
         <p:spPr>
           <a:xfrm>
-            <a:off x="8183879" y="1993392"/>
-            <a:ext cx="3383280" cy="4114800"/>
+            <a:off x="12275819" y="2990088"/>
+            <a:ext cx="5074920" cy="6172200"/>
           </a:xfrm>
           <a:prstGeom prst="rect">
             <a:avLst/>
@@ -10155,7 +10156,7 @@
           <a:lstStyle/>
           <a:p>
             <a:r>
-              <a:rPr sz="1400" b="1" i="0">
+              <a:rPr sz="1800" b="1" i="0">
                 <a:solidFill>
                   <a:srgbClr val="146634"/>
                 </a:solidFill>
@@ -10164,7 +10165,7 @@
               <a:t>✓  </a:t>
             </a:r>
             <a:r>
-              <a:rPr sz="1400" b="1" i="0">
+              <a:rPr sz="2025" b="1" i="0">
                 <a:solidFill>
                   <a:srgbClr val="146634"/>
                 </a:solidFill>
@@ -10180,7 +10181,7 @@
               </a:spcBef>
             </a:pPr>
             <a:r>
-              <a:rPr sz="1400" b="0" i="1">
+              <a:rPr sz="1575" b="0" i="1">
                 <a:solidFill>
                   <a:srgbClr val="16130A"/>
                 </a:solidFill>
@@ -10196,7 +10197,7 @@
               </a:spcBef>
             </a:pPr>
             <a:r>
-              <a:rPr sz="1400" b="1" i="0">
+              <a:rPr sz="1425" b="1" i="0">
                 <a:solidFill>
                   <a:srgbClr val="146634"/>
                 </a:solidFill>
@@ -10212,7 +10213,7 @@
               </a:spcBef>
             </a:pPr>
             <a:r>
-              <a:rPr sz="1400" b="0" i="1">
+              <a:rPr sz="1575" b="0" i="1">
                 <a:solidFill>
                   <a:srgbClr val="16130A"/>
                 </a:solidFill>
@@ -10228,7 +10229,7 @@
               </a:spcBef>
             </a:pPr>
             <a:r>
-              <a:rPr sz="1400" b="1" i="0">
+              <a:rPr sz="1425" b="1" i="0">
                 <a:solidFill>
                   <a:srgbClr val="146634"/>
                 </a:solidFill>
@@ -10244,7 +10245,7 @@
               </a:spcBef>
             </a:pPr>
             <a:r>
-              <a:rPr sz="1400" b="0" i="1">
+              <a:rPr sz="1575" b="0" i="1">
                 <a:solidFill>
                   <a:srgbClr val="16130A"/>
                 </a:solidFill>
@@ -10260,7 +10261,7 @@
               </a:spcBef>
             </a:pPr>
             <a:r>
-              <a:rPr sz="1400" b="1" i="0">
+              <a:rPr sz="1425" b="1" i="0">
                 <a:solidFill>
                   <a:srgbClr val="146634"/>
                 </a:solidFill>
@@ -10295,8 +10296,8 @@
         </p:nvSpPr>
         <p:spPr>
           <a:xfrm>
-            <a:off x="502920" y="6309360"/>
-            <a:ext cx="11201400" cy="502920"/>
+            <a:off x="754380" y="9464040"/>
+            <a:ext cx="16802100" cy="754380"/>
           </a:xfrm>
           <a:prstGeom prst="roundRect">
             <a:avLst>
@@ -10343,8 +10344,8 @@
         </p:nvSpPr>
         <p:spPr>
           <a:xfrm>
-            <a:off x="685800" y="6336792"/>
-            <a:ext cx="10881360" cy="457200"/>
+            <a:off x="1028700" y="9505188"/>
+            <a:ext cx="16322040" cy="685800"/>
           </a:xfrm>
           <a:prstGeom prst="rect">
             <a:avLst/>
@@ -10358,7 +10359,7 @@
           <a:lstStyle/>
           <a:p>
             <a:r>
-              <a:rPr sz="1400" b="1" i="0">
+              <a:rPr sz="1575" b="1" i="0">
                 <a:solidFill>
                   <a:srgbClr val="7A6100"/>
                 </a:solidFill>
@@ -10367,7 +10368,7 @@
               <a:t>THE VERDICT   </a:t>
             </a:r>
             <a:r>
-              <a:rPr sz="1400" b="1" i="0">
+              <a:rPr sz="1650" b="1" i="0">
                 <a:solidFill>
                   <a:srgbClr val="16130A"/>
                 </a:solidFill>
@@ -10376,7 +10377,7 @@
               <a:t>Confirmed: </a:t>
             </a:r>
             <a:r>
-              <a:rPr sz="1400" b="0" i="0">
+              <a:rPr sz="1650" b="0" i="0">
                 <a:solidFill>
                   <a:srgbClr val="16130A"/>
                 </a:solidFill>
@@ -10385,7 +10386,7 @@
               <a:t>a quality failure does generalise into avoiding the whole category.  </a:t>
             </a:r>
             <a:r>
-              <a:rPr sz="1400" b="1" i="0">
+              <a:rPr sz="1650" b="1" i="0">
                 <a:solidFill>
                   <a:srgbClr val="16130A"/>
                 </a:solidFill>
@@ -10394,7 +10395,7 @@
               <a:t>Challenged: </a:t>
             </a:r>
             <a:r>
-              <a:rPr sz="1400" b="0" i="0">
+              <a:rPr sz="1650" b="0" i="0">
                 <a:solidFill>
                   <a:srgbClr val="16130A"/>
                 </a:solidFill>
@@ -10432,7 +10433,7 @@
         <p:spPr>
           <a:xfrm>
             <a:off x="0" y="0"/>
-            <a:ext cx="12191695" cy="6858000"/>
+            <a:ext cx="18287542" cy="10287000"/>
           </a:xfrm>
           <a:prstGeom prst="rect">
             <a:avLst/>
@@ -10483,8 +10484,8 @@
         </p:blipFill>
         <p:spPr>
           <a:xfrm>
-            <a:off x="502920" y="320040"/>
-            <a:ext cx="975836" cy="274320"/>
+            <a:off x="754380" y="480059"/>
+            <a:ext cx="1463751" cy="411479"/>
           </a:xfrm>
           <a:prstGeom prst="rect">
             <a:avLst/>
@@ -10499,8 +10500,8 @@
         </p:nvSpPr>
         <p:spPr>
           <a:xfrm>
-            <a:off x="1280160" y="292607"/>
-            <a:ext cx="9601200" cy="365760"/>
+            <a:off x="1920239" y="438911"/>
+            <a:ext cx="14401800" cy="548640"/>
           </a:xfrm>
           <a:prstGeom prst="rect">
             <a:avLst/>
@@ -10514,7 +10515,7 @@
           <a:lstStyle/>
           <a:p>
             <a:r>
-              <a:rPr sz="1400" b="1" i="0">
+              <a:rPr sz="1950" b="1" i="0">
                 <a:solidFill>
                   <a:srgbClr val="7A6100"/>
                 </a:solidFill>
@@ -10533,8 +10534,8 @@
         </p:nvSpPr>
         <p:spPr>
           <a:xfrm>
-            <a:off x="502920" y="713232"/>
-            <a:ext cx="10607040" cy="1234440"/>
+            <a:off x="754380" y="1069848"/>
+            <a:ext cx="15910559" cy="1851660"/>
           </a:xfrm>
           <a:prstGeom prst="rect">
             <a:avLst/>
@@ -10548,7 +10549,7 @@
           <a:lstStyle/>
           <a:p>
             <a:r>
-              <a:rPr sz="2200" b="1" i="0">
+              <a:rPr sz="3300" b="1" i="0">
                 <a:solidFill>
                   <a:srgbClr val="16130A"/>
                 </a:solidFill>
@@ -10567,8 +10568,8 @@
         </p:nvSpPr>
         <p:spPr>
           <a:xfrm>
-            <a:off x="502920" y="1600200"/>
-            <a:ext cx="3657600" cy="2148840"/>
+            <a:off x="754380" y="2400300"/>
+            <a:ext cx="5486400" cy="3223260"/>
           </a:xfrm>
           <a:prstGeom prst="roundRect">
             <a:avLst>
@@ -10615,8 +10616,8 @@
         </p:nvSpPr>
         <p:spPr>
           <a:xfrm>
-            <a:off x="685800" y="1737360"/>
-            <a:ext cx="3291840" cy="1874520"/>
+            <a:off x="1028700" y="2606039"/>
+            <a:ext cx="4937760" cy="2811780"/>
           </a:xfrm>
           <a:prstGeom prst="rect">
             <a:avLst/>
@@ -10630,7 +10631,7 @@
           <a:lstStyle/>
           <a:p>
             <a:r>
-              <a:rPr sz="1400" b="1" i="0">
+              <a:rPr sz="1500" b="1" i="0">
                 <a:solidFill>
                   <a:srgbClr val="7A6100"/>
                 </a:solidFill>
@@ -10646,7 +10647,7 @@
               </a:spcBef>
             </a:pPr>
             <a:r>
-              <a:rPr sz="1400" b="1" i="0">
+              <a:rPr sz="2025" b="1" i="0">
                 <a:solidFill>
                   <a:srgbClr val="16130A"/>
                 </a:solidFill>
@@ -10662,7 +10663,7 @@
               </a:spcBef>
             </a:pPr>
             <a:r>
-              <a:rPr sz="1400" b="0" i="0">
+              <a:rPr sz="1575" b="0" i="0">
                 <a:solidFill>
                   <a:srgbClr val="3A3628"/>
                 </a:solidFill>
@@ -10681,8 +10682,8 @@
         </p:nvSpPr>
         <p:spPr>
           <a:xfrm>
-            <a:off x="4297680" y="1600200"/>
-            <a:ext cx="3657600" cy="2148840"/>
+            <a:off x="6446520" y="2400300"/>
+            <a:ext cx="5486400" cy="3223260"/>
           </a:xfrm>
           <a:prstGeom prst="roundRect">
             <a:avLst>
@@ -10729,8 +10730,8 @@
         </p:nvSpPr>
         <p:spPr>
           <a:xfrm>
-            <a:off x="4480560" y="1737360"/>
-            <a:ext cx="3291840" cy="1874520"/>
+            <a:off x="6720840" y="2606039"/>
+            <a:ext cx="4937760" cy="2811780"/>
           </a:xfrm>
           <a:prstGeom prst="rect">
             <a:avLst/>
@@ -10744,7 +10745,7 @@
           <a:lstStyle/>
           <a:p>
             <a:r>
-              <a:rPr sz="1400" b="1" i="0">
+              <a:rPr sz="1500" b="1" i="0">
                 <a:solidFill>
                   <a:srgbClr val="7A6100"/>
                 </a:solidFill>
@@ -10760,7 +10761,7 @@
               </a:spcBef>
             </a:pPr>
             <a:r>
-              <a:rPr sz="1400" b="1" i="0">
+              <a:rPr sz="2025" b="1" i="0">
                 <a:solidFill>
                   <a:srgbClr val="16130A"/>
                 </a:solidFill>
@@ -10776,7 +10777,7 @@
               </a:spcBef>
             </a:pPr>
             <a:r>
-              <a:rPr sz="1400" b="0" i="0">
+              <a:rPr sz="1575" b="0" i="0">
                 <a:solidFill>
                   <a:srgbClr val="3A3628"/>
                 </a:solidFill>
@@ -10795,8 +10796,8 @@
         </p:nvSpPr>
         <p:spPr>
           <a:xfrm>
-            <a:off x="8092440" y="1600200"/>
-            <a:ext cx="3657600" cy="2148840"/>
+            <a:off x="12138660" y="2400300"/>
+            <a:ext cx="5486400" cy="3223260"/>
           </a:xfrm>
           <a:prstGeom prst="roundRect">
             <a:avLst>
@@ -10843,8 +10844,8 @@
         </p:nvSpPr>
         <p:spPr>
           <a:xfrm>
-            <a:off x="8275320" y="1737360"/>
-            <a:ext cx="3291840" cy="1874520"/>
+            <a:off x="12412980" y="2606039"/>
+            <a:ext cx="4937760" cy="2811780"/>
           </a:xfrm>
           <a:prstGeom prst="rect">
             <a:avLst/>
@@ -10858,7 +10859,7 @@
           <a:lstStyle/>
           <a:p>
             <a:r>
-              <a:rPr sz="1400" b="1" i="0">
+              <a:rPr sz="1500" b="1" i="0">
                 <a:solidFill>
                   <a:srgbClr val="7A6100"/>
                 </a:solidFill>
@@ -10874,7 +10875,7 @@
               </a:spcBef>
             </a:pPr>
             <a:r>
-              <a:rPr sz="1400" b="1" i="0">
+              <a:rPr sz="2025" b="1" i="0">
                 <a:solidFill>
                   <a:srgbClr val="16130A"/>
                 </a:solidFill>
@@ -10890,7 +10891,7 @@
               </a:spcBef>
             </a:pPr>
             <a:r>
-              <a:rPr sz="1400" b="0" i="0">
+              <a:rPr sz="1575" b="0" i="0">
                 <a:solidFill>
                   <a:srgbClr val="3A3628"/>
                 </a:solidFill>
@@ -10909,8 +10910,8 @@
         </p:nvSpPr>
         <p:spPr>
           <a:xfrm>
-            <a:off x="502920" y="3886200"/>
-            <a:ext cx="3657600" cy="2148840"/>
+            <a:off x="754380" y="5829300"/>
+            <a:ext cx="5486400" cy="3223260"/>
           </a:xfrm>
           <a:prstGeom prst="roundRect">
             <a:avLst>
@@ -10955,8 +10956,8 @@
         </p:nvSpPr>
         <p:spPr>
           <a:xfrm>
-            <a:off x="685800" y="4023360"/>
-            <a:ext cx="3291840" cy="1874520"/>
+            <a:off x="1028700" y="6035040"/>
+            <a:ext cx="4937760" cy="2811780"/>
           </a:xfrm>
           <a:prstGeom prst="rect">
             <a:avLst/>
@@ -10970,7 +10971,7 @@
           <a:lstStyle/>
           <a:p>
             <a:r>
-              <a:rPr sz="1400" b="1" i="0">
+              <a:rPr sz="1500" b="1" i="0">
                 <a:solidFill>
                   <a:srgbClr val="146634"/>
                 </a:solidFill>
@@ -10986,7 +10987,7 @@
               </a:spcBef>
             </a:pPr>
             <a:r>
-              <a:rPr sz="1400" b="1" i="0">
+              <a:rPr sz="2025" b="1" i="0">
                 <a:solidFill>
                   <a:srgbClr val="16130A"/>
                 </a:solidFill>
@@ -11002,7 +11003,7 @@
               </a:spcBef>
             </a:pPr>
             <a:r>
-              <a:rPr sz="1400" b="0" i="0">
+              <a:rPr sz="1575" b="0" i="0">
                 <a:solidFill>
                   <a:srgbClr val="3A3628"/>
                 </a:solidFill>
@@ -11021,8 +11022,8 @@
         </p:nvSpPr>
         <p:spPr>
           <a:xfrm>
-            <a:off x="4297680" y="3886200"/>
-            <a:ext cx="3657600" cy="2148840"/>
+            <a:off x="6446520" y="5829300"/>
+            <a:ext cx="5486400" cy="3223260"/>
           </a:xfrm>
           <a:prstGeom prst="roundRect">
             <a:avLst>
@@ -11067,8 +11068,8 @@
         </p:nvSpPr>
         <p:spPr>
           <a:xfrm>
-            <a:off x="4480560" y="4023360"/>
-            <a:ext cx="3291840" cy="1874520"/>
+            <a:off x="6720840" y="6035040"/>
+            <a:ext cx="4937760" cy="2811780"/>
           </a:xfrm>
           <a:prstGeom prst="rect">
             <a:avLst/>
@@ -11082,7 +11083,7 @@
           <a:lstStyle/>
           <a:p>
             <a:r>
-              <a:rPr sz="1400" b="1" i="0">
+              <a:rPr sz="1500" b="1" i="0">
                 <a:solidFill>
                   <a:srgbClr val="146634"/>
                 </a:solidFill>
@@ -11098,7 +11099,7 @@
               </a:spcBef>
             </a:pPr>
             <a:r>
-              <a:rPr sz="1400" b="1" i="0">
+              <a:rPr sz="2025" b="1" i="0">
                 <a:solidFill>
                   <a:srgbClr val="16130A"/>
                 </a:solidFill>
@@ -11114,7 +11115,7 @@
               </a:spcBef>
             </a:pPr>
             <a:r>
-              <a:rPr sz="1400" b="0" i="0">
+              <a:rPr sz="1575" b="0" i="0">
                 <a:solidFill>
                   <a:srgbClr val="3A3628"/>
                 </a:solidFill>
@@ -11133,8 +11134,8 @@
         </p:nvSpPr>
         <p:spPr>
           <a:xfrm>
-            <a:off x="8092440" y="3886200"/>
-            <a:ext cx="3657600" cy="2148840"/>
+            <a:off x="12138660" y="5829300"/>
+            <a:ext cx="5486400" cy="3223260"/>
           </a:xfrm>
           <a:prstGeom prst="roundRect">
             <a:avLst>
@@ -11179,8 +11180,8 @@
         </p:nvSpPr>
         <p:spPr>
           <a:xfrm>
-            <a:off x="8275320" y="4023360"/>
-            <a:ext cx="3291840" cy="1874520"/>
+            <a:off x="12412980" y="6035040"/>
+            <a:ext cx="4937760" cy="2811780"/>
           </a:xfrm>
           <a:prstGeom prst="rect">
             <a:avLst/>
@@ -11194,7 +11195,7 @@
           <a:lstStyle/>
           <a:p>
             <a:r>
-              <a:rPr sz="1400" b="1" i="0">
+              <a:rPr sz="1500" b="1" i="0">
                 <a:solidFill>
                   <a:srgbClr val="F8CD1B"/>
                 </a:solidFill>
@@ -11210,7 +11211,7 @@
               </a:spcBef>
             </a:pPr>
             <a:r>
-              <a:rPr sz="1400" b="1" i="0">
+              <a:rPr sz="2025" b="1" i="0">
                 <a:solidFill>
                   <a:srgbClr val="FFFFFF"/>
                 </a:solidFill>
@@ -11226,7 +11227,7 @@
               </a:spcBef>
             </a:pPr>
             <a:r>
-              <a:rPr sz="1400" b="0" i="0">
+              <a:rPr sz="1575" b="0" i="0">
                 <a:solidFill>
                   <a:srgbClr val="DAD8CE"/>
                 </a:solidFill>
@@ -11245,8 +11246,8 @@
         </p:nvSpPr>
         <p:spPr>
           <a:xfrm>
-            <a:off x="502920" y="6080760"/>
-            <a:ext cx="11201400" cy="548640"/>
+            <a:off x="754380" y="9121140"/>
+            <a:ext cx="16802100" cy="822959"/>
           </a:xfrm>
           <a:prstGeom prst="roundRect">
             <a:avLst>
@@ -11293,8 +11294,8 @@
         </p:nvSpPr>
         <p:spPr>
           <a:xfrm>
-            <a:off x="685800" y="6108192"/>
-            <a:ext cx="10881360" cy="502920"/>
+            <a:off x="1028700" y="9162288"/>
+            <a:ext cx="16322040" cy="754380"/>
           </a:xfrm>
           <a:prstGeom prst="rect">
             <a:avLst/>
@@ -11308,7 +11309,7 @@
           <a:lstStyle/>
           <a:p>
             <a:r>
-              <a:rPr sz="1400" b="1" i="0">
+              <a:rPr sz="1575" b="1" i="0">
                 <a:solidFill>
                   <a:srgbClr val="16130A"/>
                 </a:solidFill>
@@ -11317,7 +11318,7 @@
               <a:t>Evidence base: </a:t>
             </a:r>
             <a:r>
-              <a:rPr sz="1400" b="0" i="0">
+              <a:rPr sz="1575" b="0" i="0">
                 <a:solidFill>
                   <a:srgbClr val="3A3628"/>
                 </a:solidFill>
@@ -11355,7 +11356,7 @@
         <p:spPr>
           <a:xfrm>
             <a:off x="0" y="0"/>
-            <a:ext cx="12191695" cy="6858000"/>
+            <a:ext cx="18287542" cy="10287000"/>
           </a:xfrm>
           <a:prstGeom prst="rect">
             <a:avLst/>
@@ -11406,8 +11407,8 @@
         </p:blipFill>
         <p:spPr>
           <a:xfrm>
-            <a:off x="502920" y="320040"/>
-            <a:ext cx="975836" cy="274320"/>
+            <a:off x="754380" y="480059"/>
+            <a:ext cx="1463751" cy="411479"/>
           </a:xfrm>
           <a:prstGeom prst="rect">
             <a:avLst/>
@@ -11422,8 +11423,8 @@
         </p:nvSpPr>
         <p:spPr>
           <a:xfrm>
-            <a:off x="1280160" y="292607"/>
-            <a:ext cx="9601200" cy="365760"/>
+            <a:off x="1920239" y="438911"/>
+            <a:ext cx="14401800" cy="548640"/>
           </a:xfrm>
           <a:prstGeom prst="rect">
             <a:avLst/>
@@ -11437,7 +11438,7 @@
           <a:lstStyle/>
           <a:p>
             <a:r>
-              <a:rPr sz="1400" b="1" i="0">
+              <a:rPr sz="1950" b="1" i="0">
                 <a:solidFill>
                   <a:srgbClr val="7A6100"/>
                 </a:solidFill>
@@ -11456,8 +11457,8 @@
         </p:nvSpPr>
         <p:spPr>
           <a:xfrm>
-            <a:off x="502920" y="713232"/>
-            <a:ext cx="11155680" cy="1234440"/>
+            <a:off x="754380" y="1069848"/>
+            <a:ext cx="16733519" cy="1851660"/>
           </a:xfrm>
           <a:prstGeom prst="rect">
             <a:avLst/>
@@ -11471,7 +11472,7 @@
           <a:lstStyle/>
           <a:p>
             <a:r>
-              <a:rPr sz="2200" b="1" i="0">
+              <a:rPr sz="3300" b="1" i="0">
                 <a:solidFill>
                   <a:srgbClr val="16130A"/>
                 </a:solidFill>
@@ -11490,8 +11491,8 @@
         </p:nvSpPr>
         <p:spPr>
           <a:xfrm>
-            <a:off x="502920" y="1691640"/>
-            <a:ext cx="7863840" cy="4160520"/>
+            <a:off x="754380" y="2537460"/>
+            <a:ext cx="11795759" cy="6240779"/>
           </a:xfrm>
           <a:prstGeom prst="roundRect">
             <a:avLst>
@@ -11538,8 +11539,8 @@
         </p:nvSpPr>
         <p:spPr>
           <a:xfrm>
-            <a:off x="685800" y="1810512"/>
-            <a:ext cx="7498079" cy="320040"/>
+            <a:off x="1028700" y="2715768"/>
+            <a:ext cx="11247119" cy="480059"/>
           </a:xfrm>
           <a:prstGeom prst="rect">
             <a:avLst/>
@@ -11553,7 +11554,7 @@
           <a:lstStyle/>
           <a:p>
             <a:r>
-              <a:rPr sz="1400" b="1" i="0">
+              <a:rPr sz="1800" b="1" i="0">
                 <a:solidFill>
                   <a:srgbClr val="7A6100"/>
                 </a:solidFill>
@@ -11573,8 +11574,8 @@
           <p:nvPr/>
         </p:nvGraphicFramePr>
         <p:xfrm>
-          <a:off x="685800" y="2194560"/>
-          <a:ext cx="7498078" cy="2651760"/>
+          <a:off x="1028700" y="3291839"/>
+          <a:ext cx="11247118" cy="3977639"/>
         </p:xfrm>
         <a:graphic>
           <a:graphicData uri="http://schemas.openxmlformats.org/drawingml/2006/table">
@@ -11583,19 +11584,19 @@
                 <a:tableStyleId>{5C22544A-7EE6-4342-B048-85BDC9FD1C3A}</a:tableStyleId>
               </a:tblPr>
               <a:tblGrid>
-                <a:gridCol w="1956020"/>
-                <a:gridCol w="2119022"/>
-                <a:gridCol w="1711518"/>
-                <a:gridCol w="1711518"/>
+                <a:gridCol w="2934031"/>
+                <a:gridCol w="3178533"/>
+                <a:gridCol w="2567277"/>
+                <a:gridCol w="2567277"/>
               </a:tblGrid>
-              <a:tr h="530352">
+              <a:tr h="795527">
                 <a:tc>
                   <a:txBody>
                     <a:bodyPr wrap="square"/>
                     <a:lstStyle/>
                     <a:p>
                       <a:r>
-                        <a:rPr sz="1400" b="1" i="0">
+                        <a:rPr sz="1575" b="1" i="0">
                           <a:solidFill>
                             <a:srgbClr val="FFFFFF"/>
                           </a:solidFill>
@@ -11617,7 +11618,7 @@
                     <a:lstStyle/>
                     <a:p>
                       <a:r>
-                        <a:rPr sz="1400" b="1" i="0">
+                        <a:rPr sz="1575" b="1" i="0">
                           <a:solidFill>
                             <a:srgbClr val="FFFFFF"/>
                           </a:solidFill>
@@ -11639,7 +11640,7 @@
                     <a:lstStyle/>
                     <a:p>
                       <a:r>
-                        <a:rPr sz="1400" b="1" i="0">
+                        <a:rPr sz="1575" b="1" i="0">
                           <a:solidFill>
                             <a:srgbClr val="FFFFFF"/>
                           </a:solidFill>
@@ -11661,7 +11662,7 @@
                     <a:lstStyle/>
                     <a:p>
                       <a:r>
-                        <a:rPr sz="1400" b="1" i="0">
+                        <a:rPr sz="1575" b="1" i="0">
                           <a:solidFill>
                             <a:srgbClr val="FFFFFF"/>
                           </a:solidFill>
@@ -11678,14 +11679,14 @@
                   </a:tcPr>
                 </a:tc>
               </a:tr>
-              <a:tr h="530352">
+              <a:tr h="795527">
                 <a:tc>
                   <a:txBody>
                     <a:bodyPr wrap="square"/>
                     <a:lstStyle/>
                     <a:p>
                       <a:r>
-                        <a:rPr sz="1400" b="0" i="0">
+                        <a:rPr sz="1425" b="0" i="0">
                           <a:solidFill>
                             <a:srgbClr val="16130A"/>
                           </a:solidFill>
@@ -11707,7 +11708,7 @@
                     <a:lstStyle/>
                     <a:p>
                       <a:r>
-                        <a:rPr sz="1400" b="0" i="0">
+                        <a:rPr sz="1425" b="0" i="0">
                           <a:solidFill>
                             <a:srgbClr val="3A3628"/>
                           </a:solidFill>
@@ -11729,7 +11730,7 @@
                     <a:lstStyle/>
                     <a:p>
                       <a:r>
-                        <a:rPr sz="1400" b="0" i="0">
+                        <a:rPr sz="1425" b="0" i="0">
                           <a:solidFill>
                             <a:srgbClr val="16130A"/>
                           </a:solidFill>
@@ -11751,7 +11752,7 @@
                     <a:lstStyle/>
                     <a:p>
                       <a:r>
-                        <a:rPr sz="1400" b="0" i="0">
+                        <a:rPr sz="1425" b="0" i="0">
                           <a:solidFill>
                             <a:srgbClr val="16130A"/>
                           </a:solidFill>
@@ -11768,14 +11769,14 @@
                   </a:tcPr>
                 </a:tc>
               </a:tr>
-              <a:tr h="530352">
+              <a:tr h="795527">
                 <a:tc>
                   <a:txBody>
                     <a:bodyPr wrap="square"/>
                     <a:lstStyle/>
                     <a:p>
                       <a:r>
-                        <a:rPr sz="1400" b="0" i="0">
+                        <a:rPr sz="1425" b="0" i="0">
                           <a:solidFill>
                             <a:srgbClr val="16130A"/>
                           </a:solidFill>
@@ -11797,7 +11798,7 @@
                     <a:lstStyle/>
                     <a:p>
                       <a:r>
-                        <a:rPr sz="1400" b="0" i="0">
+                        <a:rPr sz="1425" b="0" i="0">
                           <a:solidFill>
                             <a:srgbClr val="3A3628"/>
                           </a:solidFill>
@@ -11819,7 +11820,7 @@
                     <a:lstStyle/>
                     <a:p>
                       <a:r>
-                        <a:rPr sz="1400" b="0" i="0">
+                        <a:rPr sz="1425" b="0" i="0">
                           <a:solidFill>
                             <a:srgbClr val="16130A"/>
                           </a:solidFill>
@@ -11841,7 +11842,7 @@
                     <a:lstStyle/>
                     <a:p>
                       <a:r>
-                        <a:rPr sz="1400" b="0" i="0">
+                        <a:rPr sz="1425" b="0" i="0">
                           <a:solidFill>
                             <a:srgbClr val="16130A"/>
                           </a:solidFill>
@@ -11858,14 +11859,14 @@
                   </a:tcPr>
                 </a:tc>
               </a:tr>
-              <a:tr h="530352">
+              <a:tr h="795527">
                 <a:tc>
                   <a:txBody>
                     <a:bodyPr wrap="square"/>
                     <a:lstStyle/>
                     <a:p>
                       <a:r>
-                        <a:rPr sz="1400" b="0" i="0">
+                        <a:rPr sz="1425" b="0" i="0">
                           <a:solidFill>
                             <a:srgbClr val="16130A"/>
                           </a:solidFill>
@@ -11887,7 +11888,7 @@
                     <a:lstStyle/>
                     <a:p>
                       <a:r>
-                        <a:rPr sz="1400" b="0" i="0">
+                        <a:rPr sz="1425" b="0" i="0">
                           <a:solidFill>
                             <a:srgbClr val="3A3628"/>
                           </a:solidFill>
@@ -11909,7 +11910,7 @@
                     <a:lstStyle/>
                     <a:p>
                       <a:r>
-                        <a:rPr sz="1400" b="0" i="0">
+                        <a:rPr sz="1425" b="0" i="0">
                           <a:solidFill>
                             <a:srgbClr val="16130A"/>
                           </a:solidFill>
@@ -11931,7 +11932,7 @@
                     <a:lstStyle/>
                     <a:p>
                       <a:r>
-                        <a:rPr sz="1400" b="0" i="0">
+                        <a:rPr sz="1425" b="0" i="0">
                           <a:solidFill>
                             <a:srgbClr val="16130A"/>
                           </a:solidFill>
@@ -11948,14 +11949,14 @@
                   </a:tcPr>
                 </a:tc>
               </a:tr>
-              <a:tr h="530352">
+              <a:tr h="795531">
                 <a:tc>
                   <a:txBody>
                     <a:bodyPr wrap="square"/>
                     <a:lstStyle/>
                     <a:p>
                       <a:r>
-                        <a:rPr sz="1400" b="1" i="0">
+                        <a:rPr sz="1425" b="1" i="0">
                           <a:solidFill>
                             <a:srgbClr val="16130A"/>
                           </a:solidFill>
@@ -11977,7 +11978,7 @@
                     <a:lstStyle/>
                     <a:p>
                       <a:r>
-                        <a:rPr sz="1400" b="0" i="0">
+                        <a:rPr sz="1425" b="0" i="0">
                           <a:solidFill>
                             <a:srgbClr val="3A3628"/>
                           </a:solidFill>
@@ -11999,7 +12000,7 @@
                     <a:lstStyle/>
                     <a:p>
                       <a:r>
-                        <a:rPr sz="1400" b="1" i="0">
+                        <a:rPr sz="1425" b="1" i="0">
                           <a:solidFill>
                             <a:srgbClr val="146634"/>
                           </a:solidFill>
@@ -12021,7 +12022,7 @@
                     <a:lstStyle/>
                     <a:p>
                       <a:r>
-                        <a:rPr sz="1400" b="1" i="0">
+                        <a:rPr sz="1425" b="1" i="0">
                           <a:solidFill>
                             <a:srgbClr val="146634"/>
                           </a:solidFill>
@@ -12050,8 +12051,8 @@
         </p:nvSpPr>
         <p:spPr>
           <a:xfrm>
-            <a:off x="685800" y="5029200"/>
-            <a:ext cx="7498079" cy="777240"/>
+            <a:off x="1028700" y="7543800"/>
+            <a:ext cx="11247119" cy="1165860"/>
           </a:xfrm>
           <a:prstGeom prst="rect">
             <a:avLst/>
@@ -12084,8 +12085,8 @@
         </p:nvSpPr>
         <p:spPr>
           <a:xfrm>
-            <a:off x="8549640" y="1691640"/>
-            <a:ext cx="3154680" cy="4160520"/>
+            <a:off x="12824459" y="2537460"/>
+            <a:ext cx="4732020" cy="6240779"/>
           </a:xfrm>
           <a:prstGeom prst="roundRect">
             <a:avLst>
@@ -12130,8 +12131,8 @@
         </p:nvSpPr>
         <p:spPr>
           <a:xfrm>
-            <a:off x="8732520" y="1828800"/>
-            <a:ext cx="2788920" cy="3931920"/>
+            <a:off x="13098780" y="2743200"/>
+            <a:ext cx="4183379" cy="5897879"/>
           </a:xfrm>
           <a:prstGeom prst="rect">
             <a:avLst/>
@@ -12145,7 +12146,7 @@
           <a:lstStyle/>
           <a:p>
             <a:r>
-              <a:rPr sz="1400" b="1" i="0">
+              <a:rPr sz="1650" b="1" i="0">
                 <a:solidFill>
                   <a:srgbClr val="F8CD1B"/>
                 </a:solidFill>
@@ -12161,7 +12162,7 @@
               </a:spcBef>
             </a:pPr>
             <a:r>
-              <a:rPr sz="1800" b="1" i="0">
+              <a:rPr sz="2700" b="1" i="0">
                 <a:solidFill>
                   <a:srgbClr val="FFFFFF"/>
                 </a:solidFill>
@@ -12177,7 +12178,7 @@
               </a:spcBef>
             </a:pPr>
             <a:r>
-              <a:rPr sz="1400" b="0" i="0">
+              <a:rPr sz="1725" b="0" i="0">
                 <a:solidFill>
                   <a:srgbClr val="DAD8CE"/>
                 </a:solidFill>
@@ -12193,7 +12194,7 @@
               </a:spcBef>
             </a:pPr>
             <a:r>
-              <a:rPr sz="1400" b="1" i="0">
+              <a:rPr sz="1800" b="1" i="0">
                 <a:solidFill>
                   <a:srgbClr val="FFFFFF"/>
                 </a:solidFill>
@@ -12209,7 +12210,7 @@
               </a:spcBef>
             </a:pPr>
             <a:r>
-              <a:rPr sz="1400" b="0" i="0">
+              <a:rPr sz="1650" b="0" i="0">
                 <a:solidFill>
                   <a:srgbClr val="DAD8CE"/>
                 </a:solidFill>
@@ -12247,7 +12248,7 @@
         <p:spPr>
           <a:xfrm>
             <a:off x="0" y="0"/>
-            <a:ext cx="12191695" cy="6858000"/>
+            <a:ext cx="18287542" cy="10287000"/>
           </a:xfrm>
           <a:prstGeom prst="rect">
             <a:avLst/>
@@ -12298,8 +12299,8 @@
         </p:blipFill>
         <p:spPr>
           <a:xfrm>
-            <a:off x="502920" y="320040"/>
-            <a:ext cx="975836" cy="274320"/>
+            <a:off x="754380" y="480059"/>
+            <a:ext cx="1463751" cy="411479"/>
           </a:xfrm>
           <a:prstGeom prst="rect">
             <a:avLst/>
@@ -12314,8 +12315,8 @@
         </p:nvSpPr>
         <p:spPr>
           <a:xfrm>
-            <a:off x="1280160" y="292607"/>
-            <a:ext cx="9601200" cy="365760"/>
+            <a:off x="1920239" y="438911"/>
+            <a:ext cx="14401800" cy="548640"/>
           </a:xfrm>
           <a:prstGeom prst="rect">
             <a:avLst/>
@@ -12329,7 +12330,7 @@
           <a:lstStyle/>
           <a:p>
             <a:r>
-              <a:rPr sz="1400" b="1" i="0">
+              <a:rPr sz="1800" b="1" i="0">
                 <a:solidFill>
                   <a:srgbClr val="7A6100"/>
                 </a:solidFill>
@@ -12348,8 +12349,8 @@
         </p:nvSpPr>
         <p:spPr>
           <a:xfrm>
-            <a:off x="502920" y="685800"/>
-            <a:ext cx="7863840" cy="1005840"/>
+            <a:off x="754380" y="1028700"/>
+            <a:ext cx="11795759" cy="1508760"/>
           </a:xfrm>
           <a:prstGeom prst="rect">
             <a:avLst/>
@@ -12363,7 +12364,7 @@
           <a:lstStyle/>
           <a:p>
             <a:r>
-              <a:rPr sz="2000" b="1" i="0">
+              <a:rPr sz="3000" b="1" i="0">
                 <a:solidFill>
                   <a:srgbClr val="16130A"/>
                 </a:solidFill>
@@ -12382,8 +12383,8 @@
         </p:nvSpPr>
         <p:spPr>
           <a:xfrm>
-            <a:off x="502920" y="1417320"/>
-            <a:ext cx="3017520" cy="320040"/>
+            <a:off x="754380" y="2125980"/>
+            <a:ext cx="4526279" cy="480059"/>
           </a:xfrm>
           <a:prstGeom prst="rect">
             <a:avLst/>
@@ -12397,11 +12398,12 @@
           <a:lstStyle/>
           <a:p>
             <a:r>
-              <a:rPr sz="1400" b="1" i="0">
+              <a:rPr sz="1800" b="1" i="0">
                 <a:solidFill>
                   <a:srgbClr val="16130A"/>
                 </a:solidFill>
                 <a:latin typeface="Arial"/>
+                <a:hlinkClick r:id="rId3"/>
               </a:rPr>
               <a:t>Open the live agent → </a:t>
             </a:r>
@@ -12416,8 +12418,8 @@
         </p:nvSpPr>
         <p:spPr>
           <a:xfrm>
-            <a:off x="8549640" y="502920"/>
-            <a:ext cx="3154680" cy="1051560"/>
+            <a:off x="12824459" y="754380"/>
+            <a:ext cx="4732020" cy="1577339"/>
           </a:xfrm>
           <a:prstGeom prst="roundRect">
             <a:avLst>
@@ -12464,8 +12466,8 @@
         </p:nvSpPr>
         <p:spPr>
           <a:xfrm>
-            <a:off x="8686800" y="566928"/>
-            <a:ext cx="2880360" cy="914400"/>
+            <a:off x="13030200" y="850392"/>
+            <a:ext cx="4320540" cy="1371600"/>
           </a:xfrm>
           <a:prstGeom prst="rect">
             <a:avLst/>
@@ -12479,7 +12481,7 @@
           <a:lstStyle/>
           <a:p>
             <a:r>
-              <a:rPr sz="1400" b="1" i="0">
+              <a:rPr sz="1425" b="1" i="0">
                 <a:solidFill>
                   <a:srgbClr val="7A6100"/>
                 </a:solidFill>
@@ -12495,7 +12497,7 @@
               </a:spcBef>
             </a:pPr>
             <a:r>
-              <a:rPr sz="1400" b="1" i="0">
+              <a:rPr sz="1500" b="1" i="0">
                 <a:solidFill>
                   <a:srgbClr val="16130A"/>
                 </a:solidFill>
@@ -12509,64 +12511,6 @@
       <p:pic>
         <p:nvPicPr>
           <p:cNvPr id="9" name="Picture 8" descr="mvp-02-phone-nudge.png"/>
-          <p:cNvPicPr>
-            <a:picLocks noChangeAspect="1"/>
-          </p:cNvPicPr>
-          <p:nvPr/>
-        </p:nvPicPr>
-        <p:blipFill>
-          <a:blip r:embed="rId3"/>
-          <a:stretch>
-            <a:fillRect/>
-          </a:stretch>
-        </p:blipFill>
-        <p:spPr>
-          <a:xfrm>
-            <a:off x="721058" y="1783080"/>
-            <a:ext cx="1712562" cy="4160520"/>
-          </a:xfrm>
-          <a:prstGeom prst="rect">
-            <a:avLst/>
-          </a:prstGeom>
-        </p:spPr>
-      </p:pic>
-      <p:sp>
-        <p:nvSpPr>
-          <p:cNvPr id="10" name="TextBox 9"/>
-          <p:cNvSpPr txBox="1"/>
-          <p:nvPr/>
-        </p:nvSpPr>
-        <p:spPr>
-          <a:xfrm>
-            <a:off x="502920" y="5989320"/>
-            <a:ext cx="2148840" cy="822960"/>
-          </a:xfrm>
-          <a:prstGeom prst="rect">
-            <a:avLst/>
-          </a:prstGeom>
-          <a:noFill/>
-        </p:spPr>
-        <p:txBody>
-          <a:bodyPr wrap="square" anchor="t">
-            <a:spAutoFit/>
-          </a:bodyPr>
-          <a:lstStyle/>
-          <a:p>
-            <a:r>
-              <a:rPr sz="1400" b="0" i="0">
-                <a:solidFill>
-                  <a:srgbClr val="6B6857"/>
-                </a:solidFill>
-                <a:latin typeface="Arial"/>
-              </a:rPr>
-              <a:t>The shopper's view — a trust-led nudge into one adjacent category.</a:t>
-            </a:r>
-          </a:p>
-        </p:txBody>
-      </p:sp>
-      <p:pic>
-        <p:nvPicPr>
-          <p:cNvPr id="11" name="Picture 10" descr="mvp-03-reasoning-ranked.png"/>
           <p:cNvPicPr>
             <a:picLocks noChangeAspect="1"/>
           </p:cNvPicPr>
@@ -12580,8 +12524,8 @@
         </p:blipFill>
         <p:spPr>
           <a:xfrm>
-            <a:off x="2995522" y="1783080"/>
-            <a:ext cx="4021634" cy="4160520"/>
+            <a:off x="1081587" y="2674620"/>
+            <a:ext cx="2568844" cy="6240779"/>
           </a:xfrm>
           <a:prstGeom prst="rect">
             <a:avLst/>
@@ -12590,14 +12534,14 @@
       </p:pic>
       <p:sp>
         <p:nvSpPr>
-          <p:cNvPr id="12" name="TextBox 11"/>
+          <p:cNvPr id="10" name="TextBox 9"/>
           <p:cNvSpPr txBox="1"/>
           <p:nvPr/>
         </p:nvSpPr>
         <p:spPr>
           <a:xfrm>
-            <a:off x="2788920" y="5989320"/>
-            <a:ext cx="4434840" cy="502920"/>
+            <a:off x="754380" y="8983980"/>
+            <a:ext cx="3223260" cy="1234440"/>
           </a:xfrm>
           <a:prstGeom prst="rect">
             <a:avLst/>
@@ -12617,14 +12561,14 @@
                 </a:solidFill>
                 <a:latin typeface="Arial"/>
               </a:rPr>
-              <a:t>The agent's reasoning panel — why this user, why this category, and what else was considered.</a:t>
+              <a:t>The shopper's view — a trust-led nudge into one adjacent category.</a:t>
             </a:r>
           </a:p>
         </p:txBody>
       </p:sp>
       <p:pic>
         <p:nvPicPr>
-          <p:cNvPr id="13" name="Picture 12" descr="mvp-07-lockscreen.png"/>
+          <p:cNvPr id="11" name="Picture 10" descr="mvp-03-reasoning-ranked.png"/>
           <p:cNvPicPr>
             <a:picLocks noChangeAspect="1"/>
           </p:cNvPicPr>
@@ -12638,8 +12582,8 @@
         </p:blipFill>
         <p:spPr>
           <a:xfrm>
-            <a:off x="7594256" y="1783080"/>
-            <a:ext cx="1499286" cy="4160520"/>
+            <a:off x="4493283" y="2674620"/>
+            <a:ext cx="6032452" cy="6240779"/>
           </a:xfrm>
           <a:prstGeom prst="rect">
             <a:avLst/>
@@ -12648,14 +12592,14 @@
       </p:pic>
       <p:sp>
         <p:nvSpPr>
-          <p:cNvPr id="14" name="TextBox 13"/>
+          <p:cNvPr id="12" name="TextBox 11"/>
           <p:cNvSpPr txBox="1"/>
           <p:nvPr/>
         </p:nvSpPr>
         <p:spPr>
           <a:xfrm>
-            <a:off x="7360920" y="5989320"/>
-            <a:ext cx="1965960" cy="502920"/>
+            <a:off x="4183379" y="8983980"/>
+            <a:ext cx="6652259" cy="754380"/>
           </a:xfrm>
           <a:prstGeom prst="rect">
             <a:avLst/>
@@ -12675,6 +12619,64 @@
                 </a:solidFill>
                 <a:latin typeface="Arial"/>
               </a:rPr>
+              <a:t>The agent's reasoning panel — why this user, why this category, and what else was considered.</a:t>
+            </a:r>
+          </a:p>
+        </p:txBody>
+      </p:sp>
+      <p:pic>
+        <p:nvPicPr>
+          <p:cNvPr id="13" name="Picture 12" descr="mvp-07-lockscreen.png"/>
+          <p:cNvPicPr>
+            <a:picLocks noChangeAspect="1"/>
+          </p:cNvPicPr>
+          <p:nvPr/>
+        </p:nvPicPr>
+        <p:blipFill>
+          <a:blip r:embed="rId6"/>
+          <a:stretch>
+            <a:fillRect/>
+          </a:stretch>
+        </p:blipFill>
+        <p:spPr>
+          <a:xfrm>
+            <a:off x="11391385" y="2674620"/>
+            <a:ext cx="2248929" cy="6240779"/>
+          </a:xfrm>
+          <a:prstGeom prst="rect">
+            <a:avLst/>
+          </a:prstGeom>
+        </p:spPr>
+      </p:pic>
+      <p:sp>
+        <p:nvSpPr>
+          <p:cNvPr id="14" name="TextBox 13"/>
+          <p:cNvSpPr txBox="1"/>
+          <p:nvPr/>
+        </p:nvSpPr>
+        <p:spPr>
+          <a:xfrm>
+            <a:off x="11041380" y="8983980"/>
+            <a:ext cx="2948939" cy="754380"/>
+          </a:xfrm>
+          <a:prstGeom prst="rect">
+            <a:avLst/>
+          </a:prstGeom>
+          <a:noFill/>
+        </p:spPr>
+        <p:txBody>
+          <a:bodyPr wrap="square" anchor="t">
+            <a:spAutoFit/>
+          </a:bodyPr>
+          <a:lstStyle/>
+          <a:p>
+            <a:r>
+              <a:rPr sz="1400" b="0" i="0">
+                <a:solidFill>
+                  <a:srgbClr val="6B6857"/>
+                </a:solidFill>
+                <a:latin typeface="Arial"/>
+              </a:rPr>
               <a:t>Push payloads from the auto-nudge queue.</a:t>
             </a:r>
           </a:p>
@@ -12688,8 +12690,8 @@
         </p:nvSpPr>
         <p:spPr>
           <a:xfrm>
-            <a:off x="9464040" y="1828800"/>
-            <a:ext cx="2514600" cy="777240"/>
+            <a:off x="14196059" y="2743200"/>
+            <a:ext cx="3771900" cy="1165860"/>
           </a:xfrm>
           <a:prstGeom prst="roundRect">
             <a:avLst>
@@ -12736,8 +12738,8 @@
         </p:nvSpPr>
         <p:spPr>
           <a:xfrm>
-            <a:off x="9555480" y="1874519"/>
-            <a:ext cx="2331720" cy="685800"/>
+            <a:off x="14333219" y="2811779"/>
+            <a:ext cx="3497579" cy="1028700"/>
           </a:xfrm>
           <a:prstGeom prst="rect">
             <a:avLst/>
@@ -12751,7 +12753,7 @@
           <a:lstStyle/>
           <a:p>
             <a:r>
-              <a:rPr sz="1400" b="1" i="0">
+              <a:rPr sz="1425" b="1" i="0">
                 <a:solidFill>
                   <a:srgbClr val="16130A"/>
                 </a:solidFill>
@@ -12770,8 +12772,8 @@
         </p:nvSpPr>
         <p:spPr>
           <a:xfrm>
-            <a:off x="9464040" y="2834640"/>
-            <a:ext cx="2514600" cy="777240"/>
+            <a:off x="14196059" y="4251960"/>
+            <a:ext cx="3771900" cy="1165860"/>
           </a:xfrm>
           <a:prstGeom prst="roundRect">
             <a:avLst>
@@ -12818,8 +12820,8 @@
         </p:nvSpPr>
         <p:spPr>
           <a:xfrm>
-            <a:off x="9555480" y="2880360"/>
-            <a:ext cx="2331720" cy="685800"/>
+            <a:off x="14333219" y="4320540"/>
+            <a:ext cx="3497579" cy="1028700"/>
           </a:xfrm>
           <a:prstGeom prst="rect">
             <a:avLst/>
@@ -12833,7 +12835,7 @@
           <a:lstStyle/>
           <a:p>
             <a:r>
-              <a:rPr sz="1400" b="1" i="0">
+              <a:rPr sz="1425" b="1" i="0">
                 <a:solidFill>
                   <a:srgbClr val="16130A"/>
                 </a:solidFill>
@@ -12852,8 +12854,8 @@
         </p:nvSpPr>
         <p:spPr>
           <a:xfrm>
-            <a:off x="9464040" y="3840480"/>
-            <a:ext cx="2514600" cy="777240"/>
+            <a:off x="14196059" y="5760720"/>
+            <a:ext cx="3771900" cy="1165860"/>
           </a:xfrm>
           <a:prstGeom prst="roundRect">
             <a:avLst>
@@ -12900,8 +12902,8 @@
         </p:nvSpPr>
         <p:spPr>
           <a:xfrm>
-            <a:off x="9555480" y="3886200"/>
-            <a:ext cx="2331720" cy="685800"/>
+            <a:off x="14333219" y="5829300"/>
+            <a:ext cx="3497579" cy="1028700"/>
           </a:xfrm>
           <a:prstGeom prst="rect">
             <a:avLst/>
@@ -12915,7 +12917,7 @@
           <a:lstStyle/>
           <a:p>
             <a:r>
-              <a:rPr sz="1400" b="1" i="0">
+              <a:rPr sz="1425" b="1" i="0">
                 <a:solidFill>
                   <a:srgbClr val="16130A"/>
                 </a:solidFill>
@@ -12934,8 +12936,8 @@
         </p:nvSpPr>
         <p:spPr>
           <a:xfrm>
-            <a:off x="9464040" y="4617720"/>
-            <a:ext cx="2514600" cy="777240"/>
+            <a:off x="14196059" y="6926579"/>
+            <a:ext cx="3771900" cy="1165860"/>
           </a:xfrm>
           <a:prstGeom prst="roundRect">
             <a:avLst>
@@ -12982,8 +12984,8 @@
         </p:nvSpPr>
         <p:spPr>
           <a:xfrm>
-            <a:off x="9555480" y="4663440"/>
-            <a:ext cx="2331720" cy="685800"/>
+            <a:off x="14333219" y="6995159"/>
+            <a:ext cx="3497579" cy="1028700"/>
           </a:xfrm>
           <a:prstGeom prst="rect">
             <a:avLst/>
@@ -12997,7 +12999,7 @@
           <a:lstStyle/>
           <a:p>
             <a:r>
-              <a:rPr sz="1400" b="1" i="0">
+              <a:rPr sz="1425" b="1" i="0">
                 <a:solidFill>
                   <a:srgbClr val="16130A"/>
                 </a:solidFill>
@@ -13016,8 +13018,8 @@
         </p:nvSpPr>
         <p:spPr>
           <a:xfrm>
-            <a:off x="9464040" y="5394960"/>
-            <a:ext cx="2514600" cy="777240"/>
+            <a:off x="14196059" y="8092440"/>
+            <a:ext cx="3771900" cy="1165860"/>
           </a:xfrm>
           <a:prstGeom prst="roundRect">
             <a:avLst>
@@ -13064,8 +13066,8 @@
         </p:nvSpPr>
         <p:spPr>
           <a:xfrm>
-            <a:off x="9555480" y="5440680"/>
-            <a:ext cx="2331720" cy="685800"/>
+            <a:off x="14333219" y="8161020"/>
+            <a:ext cx="3497579" cy="1028700"/>
           </a:xfrm>
           <a:prstGeom prst="rect">
             <a:avLst/>
@@ -13079,7 +13081,7 @@
           <a:lstStyle/>
           <a:p>
             <a:r>
-              <a:rPr sz="1400" b="1" i="0">
+              <a:rPr sz="1425" b="1" i="0">
                 <a:solidFill>
                   <a:srgbClr val="16130A"/>
                 </a:solidFill>
@@ -13117,7 +13119,7 @@
         <p:spPr>
           <a:xfrm>
             <a:off x="0" y="0"/>
-            <a:ext cx="12191695" cy="6858000"/>
+            <a:ext cx="18287542" cy="10287000"/>
           </a:xfrm>
           <a:prstGeom prst="rect">
             <a:avLst/>
@@ -13168,8 +13170,8 @@
         </p:blipFill>
         <p:spPr>
           <a:xfrm>
-            <a:off x="502920" y="320040"/>
-            <a:ext cx="975836" cy="274320"/>
+            <a:off x="754380" y="480059"/>
+            <a:ext cx="1463751" cy="411479"/>
           </a:xfrm>
           <a:prstGeom prst="rect">
             <a:avLst/>
@@ -13184,8 +13186,8 @@
         </p:nvSpPr>
         <p:spPr>
           <a:xfrm>
-            <a:off x="1280160" y="292607"/>
-            <a:ext cx="9601200" cy="365760"/>
+            <a:off x="1920239" y="438911"/>
+            <a:ext cx="14401800" cy="548640"/>
           </a:xfrm>
           <a:prstGeom prst="rect">
             <a:avLst/>
@@ -13199,7 +13201,7 @@
           <a:lstStyle/>
           <a:p>
             <a:r>
-              <a:rPr sz="1400" b="1" i="0">
+              <a:rPr sz="1950" b="1" i="0">
                 <a:solidFill>
                   <a:srgbClr val="7A6100"/>
                 </a:solidFill>
@@ -13218,8 +13220,8 @@
         </p:nvSpPr>
         <p:spPr>
           <a:xfrm>
-            <a:off x="502920" y="713232"/>
-            <a:ext cx="11155680" cy="1234440"/>
+            <a:off x="754380" y="1069848"/>
+            <a:ext cx="16733519" cy="1851660"/>
           </a:xfrm>
           <a:prstGeom prst="rect">
             <a:avLst/>
@@ -13233,7 +13235,7 @@
           <a:lstStyle/>
           <a:p>
             <a:r>
-              <a:rPr sz="2300" b="1" i="0">
+              <a:rPr sz="3450" b="1" i="0">
                 <a:solidFill>
                   <a:srgbClr val="16130A"/>
                 </a:solidFill>
@@ -13260,8 +13262,8 @@
         </p:blipFill>
         <p:spPr>
           <a:xfrm>
-            <a:off x="748004" y="1691640"/>
-            <a:ext cx="4081830" cy="3977639"/>
+            <a:off x="1122006" y="2537460"/>
+            <a:ext cx="6122746" cy="5966459"/>
           </a:xfrm>
           <a:prstGeom prst="rect">
             <a:avLst/>
@@ -13276,8 +13278,8 @@
         </p:nvSpPr>
         <p:spPr>
           <a:xfrm>
-            <a:off x="502920" y="5760720"/>
-            <a:ext cx="4572000" cy="868680"/>
+            <a:off x="754380" y="8641080"/>
+            <a:ext cx="6858000" cy="1303019"/>
           </a:xfrm>
           <a:prstGeom prst="roundRect">
             <a:avLst>
@@ -13324,8 +13326,8 @@
         </p:nvSpPr>
         <p:spPr>
           <a:xfrm>
-            <a:off x="640080" y="5833872"/>
-            <a:ext cx="4297680" cy="731520"/>
+            <a:off x="960119" y="8750808"/>
+            <a:ext cx="6446520" cy="1097280"/>
           </a:xfrm>
           <a:prstGeom prst="rect">
             <a:avLst/>
@@ -13339,7 +13341,7 @@
           <a:lstStyle/>
           <a:p>
             <a:r>
-              <a:rPr sz="1400" b="1" i="0">
+              <a:rPr sz="1500" b="1" i="0">
                 <a:solidFill>
                   <a:srgbClr val="16130A"/>
                 </a:solidFill>
@@ -13348,7 +13350,7 @@
               <a:t>The product itself says when the fix does NOT apply. </a:t>
             </a:r>
             <a:r>
-              <a:rPr sz="1400" b="0" i="0">
+              <a:rPr sz="1500" b="0" i="0">
                 <a:solidFill>
                   <a:srgbClr val="3A3628"/>
                 </a:solidFill>
@@ -13367,8 +13369,8 @@
         </p:nvSpPr>
         <p:spPr>
           <a:xfrm>
-            <a:off x="5349240" y="1691640"/>
-            <a:ext cx="6309360" cy="274320"/>
+            <a:off x="8023859" y="2537460"/>
+            <a:ext cx="9464040" cy="411479"/>
           </a:xfrm>
           <a:prstGeom prst="rect">
             <a:avLst/>
@@ -13382,7 +13384,7 @@
           <a:lstStyle/>
           <a:p>
             <a:r>
-              <a:rPr sz="1400" b="1" i="0">
+              <a:rPr sz="1725" b="1" i="0">
                 <a:solidFill>
                   <a:srgbClr val="7A6100"/>
                 </a:solidFill>
@@ -13401,8 +13403,8 @@
         </p:nvSpPr>
         <p:spPr>
           <a:xfrm>
-            <a:off x="5349240" y="2011680"/>
-            <a:ext cx="6309360" cy="457200"/>
+            <a:off x="8023859" y="3017520"/>
+            <a:ext cx="9464040" cy="685800"/>
           </a:xfrm>
           <a:prstGeom prst="roundRect">
             <a:avLst>
@@ -13449,8 +13451,8 @@
         </p:nvSpPr>
         <p:spPr>
           <a:xfrm>
-            <a:off x="5486400" y="2066544"/>
-            <a:ext cx="6035040" cy="365760"/>
+            <a:off x="8229600" y="3099816"/>
+            <a:ext cx="9052559" cy="548640"/>
           </a:xfrm>
           <a:prstGeom prst="rect">
             <a:avLst/>
@@ -13464,7 +13466,7 @@
           <a:lstStyle/>
           <a:p>
             <a:r>
-              <a:rPr sz="1400" b="1" i="0">
+              <a:rPr sz="1575" b="1" i="0">
                 <a:solidFill>
                   <a:srgbClr val="7A6100"/>
                 </a:solidFill>
@@ -13473,7 +13475,7 @@
               <a:t>Input   </a:t>
             </a:r>
             <a:r>
-              <a:rPr sz="1400" b="1" i="0">
+              <a:rPr sz="1650" b="1" i="0">
                 <a:solidFill>
                   <a:srgbClr val="16130A"/>
                 </a:solidFill>
@@ -13492,8 +13494,8 @@
         </p:nvSpPr>
         <p:spPr>
           <a:xfrm>
-            <a:off x="5349240" y="2532888"/>
-            <a:ext cx="6309360" cy="457200"/>
+            <a:off x="8023859" y="3799332"/>
+            <a:ext cx="9464040" cy="685800"/>
           </a:xfrm>
           <a:prstGeom prst="roundRect">
             <a:avLst>
@@ -13538,8 +13540,8 @@
         </p:nvSpPr>
         <p:spPr>
           <a:xfrm>
-            <a:off x="5486400" y="2587752"/>
-            <a:ext cx="6035040" cy="365760"/>
+            <a:off x="8229600" y="3881628"/>
+            <a:ext cx="9052559" cy="548640"/>
           </a:xfrm>
           <a:prstGeom prst="rect">
             <a:avLst/>
@@ -13553,7 +13555,7 @@
           <a:lstStyle/>
           <a:p>
             <a:r>
-              <a:rPr sz="1400" b="1" i="0">
+              <a:rPr sz="1575" b="1" i="0">
                 <a:solidFill>
                   <a:srgbClr val="146634"/>
                 </a:solidFill>
@@ -13562,7 +13564,7 @@
               <a:t>Rule-based   </a:t>
             </a:r>
             <a:r>
-              <a:rPr sz="1400" b="1" i="0">
+              <a:rPr sz="1650" b="1" i="0">
                 <a:solidFill>
                   <a:srgbClr val="16130A"/>
                 </a:solidFill>
@@ -13581,8 +13583,8 @@
         </p:nvSpPr>
         <p:spPr>
           <a:xfrm>
-            <a:off x="5349240" y="3054096"/>
-            <a:ext cx="6309360" cy="457200"/>
+            <a:off x="8023859" y="4581144"/>
+            <a:ext cx="9464040" cy="685800"/>
           </a:xfrm>
           <a:prstGeom prst="roundRect">
             <a:avLst>
@@ -13627,8 +13629,8 @@
         </p:nvSpPr>
         <p:spPr>
           <a:xfrm>
-            <a:off x="5486400" y="3108960"/>
-            <a:ext cx="6035040" cy="365760"/>
+            <a:off x="8229600" y="4663440"/>
+            <a:ext cx="9052559" cy="548640"/>
           </a:xfrm>
           <a:prstGeom prst="rect">
             <a:avLst/>
@@ -13642,7 +13644,7 @@
           <a:lstStyle/>
           <a:p>
             <a:r>
-              <a:rPr sz="1400" b="1" i="0">
+              <a:rPr sz="1575" b="1" i="0">
                 <a:solidFill>
                   <a:srgbClr val="146634"/>
                 </a:solidFill>
@@ -13651,7 +13653,7 @@
               <a:t>Rule-based   </a:t>
             </a:r>
             <a:r>
-              <a:rPr sz="1400" b="1" i="0">
+              <a:rPr sz="1650" b="1" i="0">
                 <a:solidFill>
                   <a:srgbClr val="16130A"/>
                 </a:solidFill>
@@ -13670,8 +13672,8 @@
         </p:nvSpPr>
         <p:spPr>
           <a:xfrm>
-            <a:off x="5349240" y="3575303"/>
-            <a:ext cx="6309360" cy="457200"/>
+            <a:off x="8023859" y="5362955"/>
+            <a:ext cx="9464040" cy="685800"/>
           </a:xfrm>
           <a:prstGeom prst="roundRect">
             <a:avLst>
@@ -13716,8 +13718,8 @@
         </p:nvSpPr>
         <p:spPr>
           <a:xfrm>
-            <a:off x="5486400" y="3630168"/>
-            <a:ext cx="6035040" cy="365760"/>
+            <a:off x="8229600" y="5445252"/>
+            <a:ext cx="9052559" cy="548640"/>
           </a:xfrm>
           <a:prstGeom prst="rect">
             <a:avLst/>
@@ -13731,7 +13733,7 @@
           <a:lstStyle/>
           <a:p>
             <a:r>
-              <a:rPr sz="1400" b="1" i="0">
+              <a:rPr sz="1575" b="1" i="0">
                 <a:solidFill>
                   <a:srgbClr val="F8CD1B"/>
                 </a:solidFill>
@@ -13740,7 +13742,7 @@
               <a:t>LLM   </a:t>
             </a:r>
             <a:r>
-              <a:rPr sz="1400" b="1" i="0">
+              <a:rPr sz="1650" b="1" i="0">
                 <a:solidFill>
                   <a:srgbClr val="FFFFFF"/>
                 </a:solidFill>
@@ -13759,8 +13761,8 @@
         </p:nvSpPr>
         <p:spPr>
           <a:xfrm>
-            <a:off x="5349240" y="4096511"/>
-            <a:ext cx="6309360" cy="457200"/>
+            <a:off x="8023859" y="6144767"/>
+            <a:ext cx="9464040" cy="685800"/>
           </a:xfrm>
           <a:prstGeom prst="roundRect">
             <a:avLst>
@@ -13807,8 +13809,8 @@
         </p:nvSpPr>
         <p:spPr>
           <a:xfrm>
-            <a:off x="5486400" y="4151375"/>
-            <a:ext cx="6035040" cy="365760"/>
+            <a:off x="8229600" y="6227063"/>
+            <a:ext cx="9052559" cy="548640"/>
           </a:xfrm>
           <a:prstGeom prst="rect">
             <a:avLst/>
@@ -13822,7 +13824,7 @@
           <a:lstStyle/>
           <a:p>
             <a:r>
-              <a:rPr sz="1400" b="1" i="0">
+              <a:rPr sz="1575" b="1" i="0">
                 <a:solidFill>
                   <a:srgbClr val="7A6100"/>
                 </a:solidFill>
@@ -13831,7 +13833,7 @@
               <a:t>Output   </a:t>
             </a:r>
             <a:r>
-              <a:rPr sz="1400" b="1" i="0">
+              <a:rPr sz="1650" b="1" i="0">
                 <a:solidFill>
                   <a:srgbClr val="16130A"/>
                 </a:solidFill>
@@ -13850,8 +13852,8 @@
         </p:nvSpPr>
         <p:spPr>
           <a:xfrm>
-            <a:off x="5349240" y="4663440"/>
-            <a:ext cx="6309360" cy="1280160"/>
+            <a:off x="8023859" y="6995159"/>
+            <a:ext cx="9464040" cy="1920239"/>
           </a:xfrm>
           <a:prstGeom prst="roundRect">
             <a:avLst>
@@ -13898,8 +13900,8 @@
         </p:nvSpPr>
         <p:spPr>
           <a:xfrm>
-            <a:off x="5486400" y="4736592"/>
-            <a:ext cx="6035040" cy="1143000"/>
+            <a:off x="8229600" y="7104888"/>
+            <a:ext cx="9052559" cy="1714500"/>
           </a:xfrm>
           <a:prstGeom prst="rect">
             <a:avLst/>
@@ -13913,7 +13915,7 @@
           <a:lstStyle/>
           <a:p>
             <a:r>
-              <a:rPr sz="1400" b="1" i="0">
+              <a:rPr sz="1575" b="1" i="0">
                 <a:solidFill>
                   <a:srgbClr val="7A6100"/>
                 </a:solidFill>
@@ -13929,7 +13931,7 @@
               </a:spcBef>
             </a:pPr>
             <a:r>
-              <a:rPr sz="1400" b="1" i="0">
+              <a:rPr sz="1425" b="1" i="0">
                 <a:solidFill>
                   <a:srgbClr val="16130A"/>
                 </a:solidFill>
@@ -13938,7 +13940,7 @@
               <a:t>Never invent statistics. </a:t>
             </a:r>
             <a:r>
-              <a:rPr sz="1400" b="0" i="0">
+              <a:rPr sz="1425" b="0" i="0">
                 <a:solidFill>
                   <a:srgbClr val="3A3628"/>
                 </a:solidFill>
@@ -13954,7 +13956,7 @@
               </a:spcBef>
             </a:pPr>
             <a:r>
-              <a:rPr sz="1400" b="1" i="0">
+              <a:rPr sz="1425" b="1" i="0">
                 <a:solidFill>
                   <a:srgbClr val="16130A"/>
                 </a:solidFill>
@@ -13963,7 +13965,7 @@
               <a:t>Never overclaim to low-intent users. </a:t>
             </a:r>
             <a:r>
-              <a:rPr sz="1400" b="0" i="0">
+              <a:rPr sz="1425" b="0" i="0">
                 <a:solidFill>
                   <a:srgbClr val="3A3628"/>
                 </a:solidFill>
@@ -13982,8 +13984,8 @@
         </p:nvSpPr>
         <p:spPr>
           <a:xfrm>
-            <a:off x="5349240" y="6035040"/>
-            <a:ext cx="6309360" cy="777240"/>
+            <a:off x="8023859" y="9052559"/>
+            <a:ext cx="9464040" cy="1165860"/>
           </a:xfrm>
           <a:prstGeom prst="roundRect">
             <a:avLst>
@@ -14030,8 +14032,8 @@
         </p:nvSpPr>
         <p:spPr>
           <a:xfrm>
-            <a:off x="5486400" y="6080760"/>
-            <a:ext cx="6035040" cy="685800"/>
+            <a:off x="8229600" y="9121140"/>
+            <a:ext cx="9052559" cy="1028700"/>
           </a:xfrm>
           <a:prstGeom prst="rect">
             <a:avLst/>
@@ -14045,7 +14047,7 @@
           <a:lstStyle/>
           <a:p>
             <a:r>
-              <a:rPr sz="1400" b="1" i="0">
+              <a:rPr sz="1500" b="1" i="0">
                 <a:solidFill>
                   <a:srgbClr val="7A6100"/>
                 </a:solidFill>
@@ -14054,7 +14056,7 @@
               <a:t>Where it breaks:  </a:t>
             </a:r>
             <a:r>
-              <a:rPr sz="1400" b="0" i="0">
+              <a:rPr sz="1425" b="0" i="0">
                 <a:solidFill>
                   <a:srgbClr val="3A3628"/>
                 </a:solidFill>
